--- a/DataAnalysis_Track/decks/DA_S14_Getting_data_in_and_modelling_it.pptx
+++ b/DataAnalysis_Track/decks/DA_S14_Getting_data_in_and_modelling_it.pptx
@@ -29,6 +29,7 @@
     <p:sldId id="277" r:id="rId29"/>
     <p:sldId id="278" r:id="rId30"/>
     <p:sldId id="279" r:id="rId31"/>
+    <p:sldId id="280" r:id="rId32"/>
   </p:sldIdLst>
   <p:sldSz cx="12191695" cy="6858000" type="screen4x3"/>
   <p:notesSz cx="6858000" cy="9144000"/>
@@ -481,7 +482,7 @@
 </file>
 
 <file path=ppt/notesSlides/notesSlide1.xml><?xml version="1.0" encoding="utf-8"?>
-<p:notes xmlns:a="http://schemas.openxmlformats.org/drawingml/2006/main" xmlns:p="http://schemas.openxmlformats.org/presentationml/2006/main" xmlns:r="http://schemas.openxmlformats.org/officeDocument/2006/relationships">
+<p:notes xmlns:a="http://schemas.openxmlformats.org/drawingml/2006/main" xmlns:p="http://schemas.openxmlformats.org/presentationml/2006/main">
   <p:cSld>
     <p:spTree>
       <p:nvGrpSpPr>
@@ -525,7 +526,42 @@
           <a:lstStyle/>
           <a:p>
             <a:r>
+              <a:t>TEACHING PURPOSE</a:t>
+            </a:r>
+          </a:p>
+          <a:p>
+            <a:r>
+              <a:t>Getting data in, and modelling it</a:t>
+            </a:r>
+          </a:p>
+          <a:p>
+            <a:r>
+              <a:t/>
+            </a:r>
+          </a:p>
+          <a:p>
+            <a:r>
+              <a:t>LECTURER CUE</a:t>
+            </a:r>
+          </a:p>
+          <a:p>
+            <a:r>
               <a:t>Start on time.</a:t>
+            </a:r>
+          </a:p>
+          <a:p>
+            <a:r>
+              <a:t/>
+            </a:r>
+          </a:p>
+          <a:p>
+            <a:r>
+              <a:t>NEXT</a:t>
+            </a:r>
+          </a:p>
+          <a:p>
+            <a:r>
+              <a:t>Where tonight sits. Move on after a learner can explain the current example or required action.</a:t>
             </a:r>
           </a:p>
         </p:txBody>
@@ -551,7 +587,7 @@
 </file>
 
 <file path=ppt/notesSlides/notesSlide10.xml><?xml version="1.0" encoding="utf-8"?>
-<p:notes xmlns:a="http://schemas.openxmlformats.org/drawingml/2006/main" xmlns:p="http://schemas.openxmlformats.org/presentationml/2006/main" xmlns:r="http://schemas.openxmlformats.org/officeDocument/2006/relationships">
+<p:notes xmlns:a="http://schemas.openxmlformats.org/drawingml/2006/main" xmlns:p="http://schemas.openxmlformats.org/presentationml/2006/main">
   <p:cSld>
     <p:spTree>
       <p:nvGrpSpPr>
@@ -593,7 +629,91 @@
         <p:txBody>
           <a:bodyPr/>
           <a:lstStyle/>
-          <a:p/>
+          <a:p>
+            <a:r>
+              <a:t>TEACHING PURPOSE</a:t>
+            </a:r>
+          </a:p>
+          <a:p>
+            <a:r>
+              <a:t>The date table, and the step everybody skips</a:t>
+            </a:r>
+          </a:p>
+          <a:p>
+            <a:r>
+              <a:t/>
+            </a:r>
+          </a:p>
+          <a:p>
+            <a:r>
+              <a:t>CONNECT</a:t>
+            </a:r>
+          </a:p>
+          <a:p>
+            <a:r>
+              <a:t>Build on the preceding slide: A date table.</a:t>
+            </a:r>
+          </a:p>
+          <a:p>
+            <a:r>
+              <a:t/>
+            </a:r>
+          </a:p>
+          <a:p>
+            <a:r>
+              <a:t>EXPLAIN IN ORDINARY WORDS</a:t>
+            </a:r>
+          </a:p>
+          <a:p>
+            <a:r>
+              <a:t>A seasonal pattern repeats at calendar intervals. Compare like periods before calling a change growth; compare counts, coverage and definitions as well.</a:t>
+            </a:r>
+          </a:p>
+          <a:p>
+            <a:r>
+              <a:t/>
+            </a:r>
+          </a:p>
+          <a:p>
+            <a:r>
+              <a:t>CHECK AND EXPECTED ANSWER</a:t>
+            </a:r>
+          </a:p>
+          <a:p>
+            <a:r>
+              <a:t>Does a rise from November to December prove underlying growth? No; compare comparable Decembers and inspect the wider series.</a:t>
+            </a:r>
+          </a:p>
+          <a:p>
+            <a:r>
+              <a:t/>
+            </a:r>
+          </a:p>
+          <a:p>
+            <a:r>
+              <a:t>IF LEARNERS ARE STUCK</a:t>
+            </a:r>
+          </a:p>
+          <a:p>
+            <a:r>
+              <a:t>Draw a two-year timeline and match the same months. Separate description from an explanation of cause.</a:t>
+            </a:r>
+          </a:p>
+          <a:p>
+            <a:r>
+              <a:t/>
+            </a:r>
+          </a:p>
+          <a:p>
+            <a:r>
+              <a:t>NEXT</a:t>
+            </a:r>
+          </a:p>
+          <a:p>
+            <a:r>
+              <a:t>Break. Move on after a learner can explain the current example or required action.</a:t>
+            </a:r>
+          </a:p>
         </p:txBody>
       </p:sp>
       <p:sp>
@@ -616,8 +736,8 @@
 </p:notes>
 </file>
 
-<file path=ppt/notesSlides/notesSlide11.xml><?xml version="1.0" encoding="utf-8"?>
-<p:notes xmlns:a="http://schemas.openxmlformats.org/drawingml/2006/main" xmlns:p="http://schemas.openxmlformats.org/presentationml/2006/main" xmlns:r="http://schemas.openxmlformats.org/officeDocument/2006/relationships">
+<file path=ppt/notesSlides/notesSlide10006.xml><?xml version="1.0" encoding="utf-8"?>
+<p:notes xmlns:a="http://schemas.openxmlformats.org/drawingml/2006/main" xmlns:p="http://schemas.openxmlformats.org/presentationml/2006/main">
   <p:cSld>
     <p:spTree>
       <p:nvGrpSpPr>
@@ -661,7 +781,57 @@
           <a:lstStyle/>
           <a:p>
             <a:r>
-              <a:t>Ten minutes.</a:t>
+              <a:t>TEACHING PURPOSE</a:t>
+            </a:r>
+          </a:p>
+          <a:p>
+            <a:r>
+              <a:t>Power Query: get it in, shape it, keep the recipe</a:t>
+            </a:r>
+          </a:p>
+          <a:p>
+            <a:r>
+              <a:t/>
+            </a:r>
+          </a:p>
+          <a:p>
+            <a:r>
+              <a:t>CONNECT</a:t>
+            </a:r>
+          </a:p>
+          <a:p>
+            <a:r>
+              <a:t>Build on the preceding slide: Why does a Power BI total come out wrong.</a:t>
+            </a:r>
+          </a:p>
+          <a:p>
+            <a:r>
+              <a:t/>
+            </a:r>
+          </a:p>
+          <a:p>
+            <a:r>
+              <a:t>DELIVER THIS SLIDE</a:t>
+            </a:r>
+          </a:p>
+          <a:p>
+            <a:r>
+              <a:t>Read the stated purpose, then point to the named example or action on the slide. Ask learners to describe what they will do before moving on. For a break slide, announce the return time; for a section divider, name the next concrete task.</a:t>
+            </a:r>
+          </a:p>
+          <a:p>
+            <a:r>
+              <a:t/>
+            </a:r>
+          </a:p>
+          <a:p>
+            <a:r>
+              <a:t>NEXT</a:t>
+            </a:r>
+          </a:p>
+          <a:p>
+            <a:r>
+              <a:t>Power BI is three products, and people confuse them. Move on after a learner can explain the current example or required action.</a:t>
             </a:r>
           </a:p>
         </p:txBody>
@@ -686,8 +856,8 @@
 </p:notes>
 </file>
 
-<file path=ppt/notesSlides/notesSlide12.xml><?xml version="1.0" encoding="utf-8"?>
-<p:notes xmlns:a="http://schemas.openxmlformats.org/drawingml/2006/main" xmlns:p="http://schemas.openxmlformats.org/presentationml/2006/main" xmlns:r="http://schemas.openxmlformats.org/officeDocument/2006/relationships">
+<file path=ppt/notesSlides/notesSlide10013.xml><?xml version="1.0" encoding="utf-8"?>
+<p:notes xmlns:a="http://schemas.openxmlformats.org/drawingml/2006/main" xmlns:p="http://schemas.openxmlformats.org/presentationml/2006/main">
   <p:cSld>
     <p:spTree>
       <p:nvGrpSpPr>
@@ -731,7 +901,57 @@
           <a:lstStyle/>
           <a:p>
             <a:r>
-              <a:t>The same six tables you mapped by hand in session 2, now as a model. The arrows all point the same way: many orders to one customer. Row counts are the real ones.</a:t>
+              <a:t>TEACHING PURPOSE</a:t>
+            </a:r>
+          </a:p>
+          <a:p>
+            <a:r>
+              <a:t>The model, which is where the marks are</a:t>
+            </a:r>
+          </a:p>
+          <a:p>
+            <a:r>
+              <a:t/>
+            </a:r>
+          </a:p>
+          <a:p>
+            <a:r>
+              <a:t>CONNECT</a:t>
+            </a:r>
+          </a:p>
+          <a:p>
+            <a:r>
+              <a:t>Build on the preceding slide: Break.</a:t>
+            </a:r>
+          </a:p>
+          <a:p>
+            <a:r>
+              <a:t/>
+            </a:r>
+          </a:p>
+          <a:p>
+            <a:r>
+              <a:t>DELIVER THIS SLIDE</a:t>
+            </a:r>
+          </a:p>
+          <a:p>
+            <a:r>
+              <a:t>Read the stated purpose, then point to the named example or action on the slide. Ask learners to describe what they will do before moving on. For a break slide, announce the return time; for a section divider, name the next concrete task.</a:t>
+            </a:r>
+          </a:p>
+          <a:p>
+            <a:r>
+              <a:t/>
+            </a:r>
+          </a:p>
+          <a:p>
+            <a:r>
+              <a:t>NEXT</a:t>
+            </a:r>
+          </a:p>
+          <a:p>
+            <a:r>
+              <a:t>What you are building tonight. Move on after a learner can explain the current example or required action.</a:t>
             </a:r>
           </a:p>
         </p:txBody>
@@ -756,8 +976,8 @@
 </p:notes>
 </file>
 
-<file path=ppt/notesSlides/notesSlide13.xml><?xml version="1.0" encoding="utf-8"?>
-<p:notes xmlns:a="http://schemas.openxmlformats.org/drawingml/2006/main" xmlns:p="http://schemas.openxmlformats.org/presentationml/2006/main" xmlns:r="http://schemas.openxmlformats.org/officeDocument/2006/relationships">
+<file path=ppt/notesSlides/notesSlide10021.xml><?xml version="1.0" encoding="utf-8"?>
+<p:notes xmlns:a="http://schemas.openxmlformats.org/drawingml/2006/main" xmlns:p="http://schemas.openxmlformats.org/presentationml/2006/main">
   <p:cSld>
     <p:spTree>
       <p:nvGrpSpPr>
@@ -799,7 +1019,91 @@
         <p:txBody>
           <a:bodyPr/>
           <a:lstStyle/>
-          <a:p/>
+          <a:p>
+            <a:r>
+              <a:t>TEACHING PURPOSE</a:t>
+            </a:r>
+          </a:p>
+          <a:p>
+            <a:r>
+              <a:t>Load it, model it, reconcile it</a:t>
+            </a:r>
+          </a:p>
+          <a:p>
+            <a:r>
+              <a:t/>
+            </a:r>
+          </a:p>
+          <a:p>
+            <a:r>
+              <a:t>CONNECT</a:t>
+            </a:r>
+          </a:p>
+          <a:p>
+            <a:r>
+              <a:t>Build on the preceding slide: How did you do?.</a:t>
+            </a:r>
+          </a:p>
+          <a:p>
+            <a:r>
+              <a:t/>
+            </a:r>
+          </a:p>
+          <a:p>
+            <a:r>
+              <a:t>EXPLAIN IN ORDINARY WORDS</a:t>
+            </a:r>
+          </a:p>
+          <a:p>
+            <a:r>
+              <a:t>Grain means what one row represents. A key identifies a row; a primary key may use more than one column. A join matches keys, and multiple matches can multiply rows.</a:t>
+            </a:r>
+          </a:p>
+          <a:p>
+            <a:r>
+              <a:t/>
+            </a:r>
+          </a:p>
+          <a:p>
+            <a:r>
+              <a:t>CHECK AND EXPECTED ANSWER</a:t>
+            </a:r>
+          </a:p>
+          <a:p>
+            <a:r>
+              <a:t>One order has two lines. After joining orders to lines, how many rows for it? Two. Summing a repeated order-level total would double-count.</a:t>
+            </a:r>
+          </a:p>
+          <a:p>
+            <a:r>
+              <a:t/>
+            </a:r>
+          </a:p>
+          <a:p>
+            <a:r>
+              <a:t>IF LEARNERS ARE STUCK</a:t>
+            </a:r>
+          </a:p>
+          <a:p>
+            <a:r>
+              <a:t>Write one example row from each table. Circle keys and trace each match. Aggregate to the intended grain and check counts and totals.</a:t>
+            </a:r>
+          </a:p>
+          <a:p>
+            <a:r>
+              <a:t/>
+            </a:r>
+          </a:p>
+          <a:p>
+            <a:r>
+              <a:t>NEXT</a:t>
+            </a:r>
+          </a:p>
+          <a:p>
+            <a:r>
+              <a:t>Load it, model it, reconcile it continued. Move on after a learner can explain the current example or required action.</a:t>
+            </a:r>
+          </a:p>
         </p:txBody>
       </p:sp>
       <p:sp>
@@ -822,8 +1126,8 @@
 </p:notes>
 </file>
 
-<file path=ppt/notesSlides/notesSlide14.xml><?xml version="1.0" encoding="utf-8"?>
-<p:notes xmlns:a="http://schemas.openxmlformats.org/drawingml/2006/main" xmlns:p="http://schemas.openxmlformats.org/presentationml/2006/main" xmlns:r="http://schemas.openxmlformats.org/officeDocument/2006/relationships">
+<file path=ppt/notesSlides/notesSlide11.xml><?xml version="1.0" encoding="utf-8"?>
+<p:notes xmlns:a="http://schemas.openxmlformats.org/drawingml/2006/main" xmlns:p="http://schemas.openxmlformats.org/presentationml/2006/main">
   <p:cSld>
     <p:spTree>
       <p:nvGrpSpPr>
@@ -867,7 +1171,57 @@
           <a:lstStyle/>
           <a:p>
             <a:r>
-              <a:t>Reference.</a:t>
+              <a:t>TEACHING PURPOSE</a:t>
+            </a:r>
+          </a:p>
+          <a:p>
+            <a:r>
+              <a:t>Break</a:t>
+            </a:r>
+          </a:p>
+          <a:p>
+            <a:r>
+              <a:t/>
+            </a:r>
+          </a:p>
+          <a:p>
+            <a:r>
+              <a:t>CONNECT</a:t>
+            </a:r>
+          </a:p>
+          <a:p>
+            <a:r>
+              <a:t>Build on the preceding slide: The date table, and the step everybody skips.</a:t>
+            </a:r>
+          </a:p>
+          <a:p>
+            <a:r>
+              <a:t/>
+            </a:r>
+          </a:p>
+          <a:p>
+            <a:r>
+              <a:t>LECTURER CUE</a:t>
+            </a:r>
+          </a:p>
+          <a:p>
+            <a:r>
+              <a:t>Ten minutes.</a:t>
+            </a:r>
+          </a:p>
+          <a:p>
+            <a:r>
+              <a:t/>
+            </a:r>
+          </a:p>
+          <a:p>
+            <a:r>
+              <a:t>NEXT</a:t>
+            </a:r>
+          </a:p>
+          <a:p>
+            <a:r>
+              <a:t>The model, which is where the marks are. Move on after a learner can explain the current example or required action.</a:t>
             </a:r>
           </a:p>
         </p:txBody>
@@ -892,8 +1246,8 @@
 </p:notes>
 </file>
 
-<file path=ppt/notesSlides/notesSlide15.xml><?xml version="1.0" encoding="utf-8"?>
-<p:notes xmlns:a="http://schemas.openxmlformats.org/drawingml/2006/main" xmlns:p="http://schemas.openxmlformats.org/presentationml/2006/main" xmlns:r="http://schemas.openxmlformats.org/officeDocument/2006/relationships">
+<file path=ppt/notesSlides/notesSlide12.xml><?xml version="1.0" encoding="utf-8"?>
+<p:notes xmlns:a="http://schemas.openxmlformats.org/drawingml/2006/main" xmlns:p="http://schemas.openxmlformats.org/presentationml/2006/main">
   <p:cSld>
     <p:spTree>
       <p:nvGrpSpPr>
@@ -937,7 +1291,72 @@
           <a:lstStyle/>
           <a:p>
             <a:r>
-              <a:t>Power BI Desktop is Windows only. Mac participants work in the browser Service throughout, loading CSVs they have already cleaned in pandas; the lab gives both paths and names the three things the browser cannot do.</a:t>
+              <a:t>TEACHING PURPOSE</a:t>
+            </a:r>
+          </a:p>
+          <a:p>
+            <a:r>
+              <a:t>What you are building tonight</a:t>
+            </a:r>
+          </a:p>
+          <a:p>
+            <a:r>
+              <a:t/>
+            </a:r>
+          </a:p>
+          <a:p>
+            <a:r>
+              <a:t>CONNECT</a:t>
+            </a:r>
+          </a:p>
+          <a:p>
+            <a:r>
+              <a:t>Build on the preceding slide: The model, which is where the marks are.</a:t>
+            </a:r>
+          </a:p>
+          <a:p>
+            <a:r>
+              <a:t/>
+            </a:r>
+          </a:p>
+          <a:p>
+            <a:r>
+              <a:t>LECTURER CUE</a:t>
+            </a:r>
+          </a:p>
+          <a:p>
+            <a:r>
+              <a:t>The same six tables you mapped by hand in session 2, now as a model. The arrows all point the same way: many orders to one customer. Row counts are the real ones.</a:t>
+            </a:r>
+          </a:p>
+          <a:p>
+            <a:r>
+              <a:t/>
+            </a:r>
+          </a:p>
+          <a:p>
+            <a:r>
+              <a:t>READ THE VISUAL</a:t>
+            </a:r>
+          </a:p>
+          <a:p>
+            <a:r>
+              <a:t>Start with the title and labels. Read one row or mark aloud, including its unit. Let a learner read a second one before discussing the pattern. Do not infer a numerical value from an unlabelled drawing.</a:t>
+            </a:r>
+          </a:p>
+          <a:p>
+            <a:r>
+              <a:t/>
+            </a:r>
+          </a:p>
+          <a:p>
+            <a:r>
+              <a:t>NEXT</a:t>
+            </a:r>
+          </a:p>
+          <a:p>
+            <a:r>
+              <a:t>Build these five relationships by hand. Move on after a learner can explain the current example or required action.</a:t>
             </a:r>
           </a:p>
         </p:txBody>
@@ -962,8 +1381,8 @@
 </p:notes>
 </file>
 
-<file path=ppt/notesSlides/notesSlide16.xml><?xml version="1.0" encoding="utf-8"?>
-<p:notes xmlns:a="http://schemas.openxmlformats.org/drawingml/2006/main" xmlns:p="http://schemas.openxmlformats.org/presentationml/2006/main" xmlns:r="http://schemas.openxmlformats.org/officeDocument/2006/relationships">
+<file path=ppt/notesSlides/notesSlide13.xml><?xml version="1.0" encoding="utf-8"?>
+<p:notes xmlns:a="http://schemas.openxmlformats.org/drawingml/2006/main" xmlns:p="http://schemas.openxmlformats.org/presentationml/2006/main">
   <p:cSld>
     <p:spTree>
       <p:nvGrpSpPr>
@@ -1007,7 +1426,87 @@
           <a:lstStyle/>
           <a:p>
             <a:r>
-              <a:t>Trusting the relationships Power BI detects for you. Check every direction, then check a total against a number you already trust.</a:t>
+              <a:t>TEACHING PURPOSE</a:t>
+            </a:r>
+          </a:p>
+          <a:p>
+            <a:r>
+              <a:t>Build these five relationships by hand</a:t>
+            </a:r>
+          </a:p>
+          <a:p>
+            <a:r>
+              <a:t/>
+            </a:r>
+          </a:p>
+          <a:p>
+            <a:r>
+              <a:t>CONNECT</a:t>
+            </a:r>
+          </a:p>
+          <a:p>
+            <a:r>
+              <a:t>Build on the preceding slide: What you are building tonight.</a:t>
+            </a:r>
+          </a:p>
+          <a:p>
+            <a:r>
+              <a:t/>
+            </a:r>
+          </a:p>
+          <a:p>
+            <a:r>
+              <a:t>EXPLAIN IN ORDINARY WORDS</a:t>
+            </a:r>
+          </a:p>
+          <a:p>
+            <a:r>
+              <a:t>Grain means what one row represents. A key identifies a row; a primary key may use more than one column. A join matches keys, and multiple matches can multiply rows.</a:t>
+            </a:r>
+          </a:p>
+          <a:p>
+            <a:r>
+              <a:t/>
+            </a:r>
+          </a:p>
+          <a:p>
+            <a:r>
+              <a:t>CHECK AND EXPECTED ANSWER</a:t>
+            </a:r>
+          </a:p>
+          <a:p>
+            <a:r>
+              <a:t>One order has two lines. After joining orders to lines, how many rows for it? Two. Summing a repeated order-level total would double-count.</a:t>
+            </a:r>
+          </a:p>
+          <a:p>
+            <a:r>
+              <a:t/>
+            </a:r>
+          </a:p>
+          <a:p>
+            <a:r>
+              <a:t>IF LEARNERS ARE STUCK</a:t>
+            </a:r>
+          </a:p>
+          <a:p>
+            <a:r>
+              <a:t>Write one example row from each table. Circle keys and trace each match. Aggregate to the intended grain and check counts and totals.</a:t>
+            </a:r>
+          </a:p>
+          <a:p>
+            <a:r>
+              <a:t/>
+            </a:r>
+          </a:p>
+          <a:p>
+            <a:r>
+              <a:t>NEXT</a:t>
+            </a:r>
+          </a:p>
+          <a:p>
+            <a:r>
+              <a:t>Reconcile against numbers you already have. Move on after a learner can explain the current example or required action.</a:t>
             </a:r>
           </a:p>
         </p:txBody>
@@ -1032,8 +1531,8 @@
 </p:notes>
 </file>
 
-<file path=ppt/notesSlides/notesSlide17.xml><?xml version="1.0" encoding="utf-8"?>
-<p:notes xmlns:a="http://schemas.openxmlformats.org/drawingml/2006/main" xmlns:p="http://schemas.openxmlformats.org/presentationml/2006/main" xmlns:r="http://schemas.openxmlformats.org/officeDocument/2006/relationships">
+<file path=ppt/notesSlides/notesSlide14.xml><?xml version="1.0" encoding="utf-8"?>
+<p:notes xmlns:a="http://schemas.openxmlformats.org/drawingml/2006/main" xmlns:p="http://schemas.openxmlformats.org/presentationml/2006/main">
   <p:cSld>
     <p:spTree>
       <p:nvGrpSpPr>
@@ -1075,7 +1574,106 @@
         <p:txBody>
           <a:bodyPr/>
           <a:lstStyle/>
-          <a:p/>
+          <a:p>
+            <a:r>
+              <a:t>TEACHING PURPOSE</a:t>
+            </a:r>
+          </a:p>
+          <a:p>
+            <a:r>
+              <a:t>Reconcile against numbers you already have</a:t>
+            </a:r>
+          </a:p>
+          <a:p>
+            <a:r>
+              <a:t/>
+            </a:r>
+          </a:p>
+          <a:p>
+            <a:r>
+              <a:t>CONNECT</a:t>
+            </a:r>
+          </a:p>
+          <a:p>
+            <a:r>
+              <a:t>Build on the preceding slide: Build these five relationships by hand.</a:t>
+            </a:r>
+          </a:p>
+          <a:p>
+            <a:r>
+              <a:t/>
+            </a:r>
+          </a:p>
+          <a:p>
+            <a:r>
+              <a:t>LECTURER CUE</a:t>
+            </a:r>
+          </a:p>
+          <a:p>
+            <a:r>
+              <a:t>Reference.</a:t>
+            </a:r>
+          </a:p>
+          <a:p>
+            <a:r>
+              <a:t/>
+            </a:r>
+          </a:p>
+          <a:p>
+            <a:r>
+              <a:t>EXPLAIN IN ORDINARY WORDS</a:t>
+            </a:r>
+          </a:p>
+          <a:p>
+            <a:r>
+              <a:t>Grain means what one row represents. A key identifies a row; a primary key may use more than one column. A join matches keys, and multiple matches can multiply rows.</a:t>
+            </a:r>
+          </a:p>
+          <a:p>
+            <a:r>
+              <a:t/>
+            </a:r>
+          </a:p>
+          <a:p>
+            <a:r>
+              <a:t>CHECK AND EXPECTED ANSWER</a:t>
+            </a:r>
+          </a:p>
+          <a:p>
+            <a:r>
+              <a:t>One order has two lines. After joining orders to lines, how many rows for it? Two. Summing a repeated order-level total would double-count.</a:t>
+            </a:r>
+          </a:p>
+          <a:p>
+            <a:r>
+              <a:t/>
+            </a:r>
+          </a:p>
+          <a:p>
+            <a:r>
+              <a:t>IF LEARNERS ARE STUCK</a:t>
+            </a:r>
+          </a:p>
+          <a:p>
+            <a:r>
+              <a:t>Write one example row from each table. Circle keys and trace each match. Aggregate to the intended grain and check counts and totals.</a:t>
+            </a:r>
+          </a:p>
+          <a:p>
+            <a:r>
+              <a:t/>
+            </a:r>
+          </a:p>
+          <a:p>
+            <a:r>
+              <a:t>NEXT</a:t>
+            </a:r>
+          </a:p>
+          <a:p>
+            <a:r>
+              <a:t>Before you start tonight. Move on after a learner can explain the current example or required action.</a:t>
+            </a:r>
+          </a:p>
         </p:txBody>
       </p:sp>
       <p:sp>
@@ -1098,8 +1696,8 @@
 </p:notes>
 </file>
 
-<file path=ppt/notesSlides/notesSlide18.xml><?xml version="1.0" encoding="utf-8"?>
-<p:notes xmlns:a="http://schemas.openxmlformats.org/drawingml/2006/main" xmlns:p="http://schemas.openxmlformats.org/presentationml/2006/main" xmlns:r="http://schemas.openxmlformats.org/officeDocument/2006/relationships">
+<file path=ppt/notesSlides/notesSlide15.xml><?xml version="1.0" encoding="utf-8"?>
+<p:notes xmlns:a="http://schemas.openxmlformats.org/drawingml/2006/main" xmlns:p="http://schemas.openxmlformats.org/presentationml/2006/main">
   <p:cSld>
     <p:spTree>
       <p:nvGrpSpPr>
@@ -1141,7 +1739,106 @@
         <p:txBody>
           <a:bodyPr/>
           <a:lstStyle/>
-          <a:p/>
+          <a:p>
+            <a:r>
+              <a:t>TEACHING PURPOSE</a:t>
+            </a:r>
+          </a:p>
+          <a:p>
+            <a:r>
+              <a:t>Before you start tonight</a:t>
+            </a:r>
+          </a:p>
+          <a:p>
+            <a:r>
+              <a:t/>
+            </a:r>
+          </a:p>
+          <a:p>
+            <a:r>
+              <a:t>CONNECT</a:t>
+            </a:r>
+          </a:p>
+          <a:p>
+            <a:r>
+              <a:t>Build on the preceding slide: Reconcile against numbers you already have.</a:t>
+            </a:r>
+          </a:p>
+          <a:p>
+            <a:r>
+              <a:t/>
+            </a:r>
+          </a:p>
+          <a:p>
+            <a:r>
+              <a:t>LECTURER CUE</a:t>
+            </a:r>
+          </a:p>
+          <a:p>
+            <a:r>
+              <a:t>Power BI Desktop requires Windows. Rehearse the browser semantic-model editor and Power Query with the actual learner account, workspace permissions and tenant settings. Use the CSV lab route; arrange a Windows lab machine if browser editing is unavailable.</a:t>
+            </a:r>
+          </a:p>
+          <a:p>
+            <a:r>
+              <a:t/>
+            </a:r>
+          </a:p>
+          <a:p>
+            <a:r>
+              <a:t>EXPLAIN IN ORDINARY WORDS</a:t>
+            </a:r>
+          </a:p>
+          <a:p>
+            <a:r>
+              <a:t>Missing means not recorded, not automatically zero. Decide why it is missing and document the rule. Fitted fill values must come from training data when evaluating a model.</a:t>
+            </a:r>
+          </a:p>
+          <a:p>
+            <a:r>
+              <a:t/>
+            </a:r>
+          </a:p>
+          <a:p>
+            <a:r>
+              <a:t>CHECK AND EXPECTED ANSWER</a:t>
+            </a:r>
+          </a:p>
+          <a:p>
+            <a:r>
+              <a:t>Is an unrecorded energy reading evidence of zero consumption? No.</a:t>
+            </a:r>
+          </a:p>
+          <a:p>
+            <a:r>
+              <a:t/>
+            </a:r>
+          </a:p>
+          <a:p>
+            <a:r>
+              <a:t>IF LEARNERS ARE STUCK</a:t>
+            </a:r>
+          </a:p>
+          <a:p>
+            <a:r>
+              <a:t>Use three rows: a recorded zero, a recorded positive value and a blank. Explain their different meanings before cleaning.</a:t>
+            </a:r>
+          </a:p>
+          <a:p>
+            <a:r>
+              <a:t/>
+            </a:r>
+          </a:p>
+          <a:p>
+            <a:r>
+              <a:t>NEXT</a:t>
+            </a:r>
+          </a:p>
+          <a:p>
+            <a:r>
+              <a:t>Trusting the relationships Power BI detects for you. Check every direction, then check a total against a number you already trust.. Move on after a learner can explain the current example or required action.</a:t>
+            </a:r>
+          </a:p>
         </p:txBody>
       </p:sp>
       <p:sp>
@@ -1164,8 +1861,8 @@
 </p:notes>
 </file>
 
-<file path=ppt/notesSlides/notesSlide19.xml><?xml version="1.0" encoding="utf-8"?>
-<p:notes xmlns:a="http://schemas.openxmlformats.org/drawingml/2006/main" xmlns:p="http://schemas.openxmlformats.org/presentationml/2006/main" xmlns:r="http://schemas.openxmlformats.org/officeDocument/2006/relationships">
+<file path=ppt/notesSlides/notesSlide16.xml><?xml version="1.0" encoding="utf-8"?>
+<p:notes xmlns:a="http://schemas.openxmlformats.org/drawingml/2006/main" xmlns:p="http://schemas.openxmlformats.org/presentationml/2006/main">
   <p:cSld>
     <p:spTree>
       <p:nvGrpSpPr>
@@ -1209,7 +1906,102 @@
           <a:lstStyle/>
           <a:p>
             <a:r>
-              <a:t>Five tables in, five relationships built by hand, a date table marked and sorted, and three visuals whose totals match the numbers you already got from SQL and pandas. Matching is the mark.</a:t>
+              <a:t>TEACHING PURPOSE</a:t>
+            </a:r>
+          </a:p>
+          <a:p>
+            <a:r>
+              <a:t>Trusting the relationships Power BI detects for you. Check every direction, then check a total against a number you already trust.</a:t>
+            </a:r>
+          </a:p>
+          <a:p>
+            <a:r>
+              <a:t/>
+            </a:r>
+          </a:p>
+          <a:p>
+            <a:r>
+              <a:t>CONNECT</a:t>
+            </a:r>
+          </a:p>
+          <a:p>
+            <a:r>
+              <a:t>Build on the preceding slide: Before you start tonight.</a:t>
+            </a:r>
+          </a:p>
+          <a:p>
+            <a:r>
+              <a:t/>
+            </a:r>
+          </a:p>
+          <a:p>
+            <a:r>
+              <a:t>LECTURER CUE</a:t>
+            </a:r>
+          </a:p>
+          <a:p>
+            <a:r>
+              <a:t>Trusting the relationships Power BI detects for you. Check every direction, then check a total against a number you already trust.</a:t>
+            </a:r>
+          </a:p>
+          <a:p>
+            <a:r>
+              <a:t/>
+            </a:r>
+          </a:p>
+          <a:p>
+            <a:r>
+              <a:t>EXPLAIN IN ORDINARY WORDS</a:t>
+            </a:r>
+          </a:p>
+          <a:p>
+            <a:r>
+              <a:t>Grain means what one row represents. A key identifies a row; a primary key may use more than one column. A join matches keys, and multiple matches can multiply rows.</a:t>
+            </a:r>
+          </a:p>
+          <a:p>
+            <a:r>
+              <a:t/>
+            </a:r>
+          </a:p>
+          <a:p>
+            <a:r>
+              <a:t>CHECK AND EXPECTED ANSWER</a:t>
+            </a:r>
+          </a:p>
+          <a:p>
+            <a:r>
+              <a:t>One order has two lines. After joining orders to lines, how many rows for it? Two. Summing a repeated order-level total would double-count.</a:t>
+            </a:r>
+          </a:p>
+          <a:p>
+            <a:r>
+              <a:t/>
+            </a:r>
+          </a:p>
+          <a:p>
+            <a:r>
+              <a:t>IF LEARNERS ARE STUCK</a:t>
+            </a:r>
+          </a:p>
+          <a:p>
+            <a:r>
+              <a:t>Write one example row from each table. Circle keys and trace each match. Aggregate to the intended grain and check counts and totals.</a:t>
+            </a:r>
+          </a:p>
+          <a:p>
+            <a:r>
+              <a:t/>
+            </a:r>
+          </a:p>
+          <a:p>
+            <a:r>
+              <a:t>NEXT</a:t>
+            </a:r>
+          </a:p>
+          <a:p>
+            <a:r>
+              <a:t>Can you answer these?. Move on after a learner can explain the current example or required action.</a:t>
             </a:r>
           </a:p>
         </p:txBody>
@@ -1234,8 +2026,8 @@
 </p:notes>
 </file>
 
-<file path=ppt/notesSlides/notesSlide2.xml><?xml version="1.0" encoding="utf-8"?>
-<p:notes xmlns:a="http://schemas.openxmlformats.org/drawingml/2006/main" xmlns:p="http://schemas.openxmlformats.org/presentationml/2006/main" xmlns:r="http://schemas.openxmlformats.org/officeDocument/2006/relationships">
+<file path=ppt/notesSlides/notesSlide17.xml><?xml version="1.0" encoding="utf-8"?>
+<p:notes xmlns:a="http://schemas.openxmlformats.org/drawingml/2006/main" xmlns:p="http://schemas.openxmlformats.org/presentationml/2006/main">
   <p:cSld>
     <p:spTree>
       <p:nvGrpSpPr>
@@ -1279,7 +2071,127 @@
           <a:lstStyle/>
           <a:p>
             <a:r>
-              <a:t>Tonight is session 14 of twelve.</a:t>
+              <a:t>TEACHING PURPOSE</a:t>
+            </a:r>
+          </a:p>
+          <a:p>
+            <a:r>
+              <a:t>Can you answer these?</a:t>
+            </a:r>
+          </a:p>
+          <a:p>
+            <a:r>
+              <a:t/>
+            </a:r>
+          </a:p>
+          <a:p>
+            <a:r>
+              <a:t>CONNECT</a:t>
+            </a:r>
+          </a:p>
+          <a:p>
+            <a:r>
+              <a:t>Build on the preceding slide: Trusting the relationships Power BI detects for you. Check every direction, then check a total against a number you already trust..</a:t>
+            </a:r>
+          </a:p>
+          <a:p>
+            <a:r>
+              <a:t/>
+            </a:r>
+          </a:p>
+          <a:p>
+            <a:r>
+              <a:t>DISCUSSION KEY FOR THIS SLIDE</a:t>
+            </a:r>
+          </a:p>
+          <a:p>
+            <a:r>
+              <a:t>ANSWERS</a:t>
+            </a:r>
+          </a:p>
+          <a:p>
+            <a:r>
+              <a:t>How did you do?</a:t>
+            </a:r>
+          </a:p>
+          <a:p>
+            <a:r>
+              <a:t>A</a:t>
+            </a:r>
+          </a:p>
+          <a:p>
+            <a:r>
+              <a:t>Why a flat table is wrong</a:t>
+            </a:r>
+          </a:p>
+          <a:p>
+            <a:r>
+              <a:t>It cannot represent something that did not happen. A customer who bought nothing this quarter and a month with no orders both vanish, because the only rows that exist are rows where something occurred. This is session 2, arriving again.</a:t>
+            </a:r>
+          </a:p>
+          <a:p>
+            <a:r>
+              <a:t>B</a:t>
+            </a:r>
+          </a:p>
+          <a:p>
+            <a:r>
+              <a:t>Months sorting alphabetically</a:t>
+            </a:r>
+          </a:p>
+          <a:p>
+            <a:r>
+              <a:t>The Month column is text and has not been told to sort by MonthNo. Column tools, Sort by column, MonthNo. It is not a bug.</a:t>
+            </a:r>
+          </a:p>
+          <a:p>
+            <a:r>
+              <a:t>C</a:t>
+            </a:r>
+          </a:p>
+          <a:p>
+            <a:r>
+              <a:t>Revenue three times too big</a:t>
+            </a:r>
+          </a:p>
+          <a:p>
+            <a:r>
+              <a:t>Fan-out from a relationship, which is session 5's trap in a new tool. Check the direction and cardinality of every one, especially any you did not build yourself.</a:t>
+            </a:r>
+          </a:p>
+          <a:p>
+            <a:r>
+              <a:t>Let learners attempt first; use this to explain the reasoning, not just reveal the answer.</a:t>
+            </a:r>
+          </a:p>
+          <a:p>
+            <a:r>
+              <a:t/>
+            </a:r>
+          </a:p>
+          <a:p>
+            <a:r>
+              <a:t>DELIVER THIS SLIDE</a:t>
+            </a:r>
+          </a:p>
+          <a:p>
+            <a:r>
+              <a:t>Read the stated purpose, then point to the named example or action on the slide. Ask learners to describe what they will do before moving on. For a break slide, announce the return time; for a section divider, name the next concrete task.</a:t>
+            </a:r>
+          </a:p>
+          <a:p>
+            <a:r>
+              <a:t/>
+            </a:r>
+          </a:p>
+          <a:p>
+            <a:r>
+              <a:t>NEXT</a:t>
+            </a:r>
+          </a:p>
+          <a:p>
+            <a:r>
+              <a:t>How did you do?. Move on after a learner can explain the current example or required action.</a:t>
             </a:r>
           </a:p>
         </p:txBody>
@@ -1304,8 +2216,8 @@
 </p:notes>
 </file>
 
-<file path=ppt/notesSlides/notesSlide20.xml><?xml version="1.0" encoding="utf-8"?>
-<p:notes xmlns:a="http://schemas.openxmlformats.org/drawingml/2006/main" xmlns:p="http://schemas.openxmlformats.org/presentationml/2006/main" xmlns:r="http://schemas.openxmlformats.org/officeDocument/2006/relationships">
+<file path=ppt/notesSlides/notesSlide18.xml><?xml version="1.0" encoding="utf-8"?>
+<p:notes xmlns:a="http://schemas.openxmlformats.org/drawingml/2006/main" xmlns:p="http://schemas.openxmlformats.org/presentationml/2006/main">
   <p:cSld>
     <p:spTree>
       <p:nvGrpSpPr>
@@ -1347,7 +2259,91 @@
         <p:txBody>
           <a:bodyPr/>
           <a:lstStyle/>
-          <a:p/>
+          <a:p>
+            <a:r>
+              <a:t>TEACHING PURPOSE</a:t>
+            </a:r>
+          </a:p>
+          <a:p>
+            <a:r>
+              <a:t>How did you do?</a:t>
+            </a:r>
+          </a:p>
+          <a:p>
+            <a:r>
+              <a:t/>
+            </a:r>
+          </a:p>
+          <a:p>
+            <a:r>
+              <a:t>CONNECT</a:t>
+            </a:r>
+          </a:p>
+          <a:p>
+            <a:r>
+              <a:t>Build on the preceding slide: Can you answer these?.</a:t>
+            </a:r>
+          </a:p>
+          <a:p>
+            <a:r>
+              <a:t/>
+            </a:r>
+          </a:p>
+          <a:p>
+            <a:r>
+              <a:t>EXPLAIN IN ORDINARY WORDS</a:t>
+            </a:r>
+          </a:p>
+          <a:p>
+            <a:r>
+              <a:t>Grain means what one row represents. A key identifies a row; a primary key may use more than one column. A join matches keys, and multiple matches can multiply rows.</a:t>
+            </a:r>
+          </a:p>
+          <a:p>
+            <a:r>
+              <a:t/>
+            </a:r>
+          </a:p>
+          <a:p>
+            <a:r>
+              <a:t>CHECK AND EXPECTED ANSWER</a:t>
+            </a:r>
+          </a:p>
+          <a:p>
+            <a:r>
+              <a:t>One order has two lines. After joining orders to lines, how many rows for it? Two. Summing a repeated order-level total would double-count.</a:t>
+            </a:r>
+          </a:p>
+          <a:p>
+            <a:r>
+              <a:t/>
+            </a:r>
+          </a:p>
+          <a:p>
+            <a:r>
+              <a:t>IF LEARNERS ARE STUCK</a:t>
+            </a:r>
+          </a:p>
+          <a:p>
+            <a:r>
+              <a:t>Write one example row from each table. Circle keys and trace each match. Aggregate to the intended grain and check counts and totals.</a:t>
+            </a:r>
+          </a:p>
+          <a:p>
+            <a:r>
+              <a:t/>
+            </a:r>
+          </a:p>
+          <a:p>
+            <a:r>
+              <a:t>NEXT</a:t>
+            </a:r>
+          </a:p>
+          <a:p>
+            <a:r>
+              <a:t>Load it, model it, reconcile it. Move on after a learner can explain the current example or required action.</a:t>
+            </a:r>
+          </a:p>
         </p:txBody>
       </p:sp>
       <p:sp>
@@ -1370,8 +2366,8 @@
 </p:notes>
 </file>
 
-<file path=ppt/notesSlides/notesSlide21.xml><?xml version="1.0" encoding="utf-8"?>
-<p:notes xmlns:a="http://schemas.openxmlformats.org/drawingml/2006/main" xmlns:p="http://schemas.openxmlformats.org/presentationml/2006/main" xmlns:r="http://schemas.openxmlformats.org/officeDocument/2006/relationships">
+<file path=ppt/notesSlides/notesSlide19.xml><?xml version="1.0" encoding="utf-8"?>
+<p:notes xmlns:a="http://schemas.openxmlformats.org/drawingml/2006/main" xmlns:p="http://schemas.openxmlformats.org/presentationml/2006/main">
   <p:cSld>
     <p:spTree>
       <p:nvGrpSpPr>
@@ -1415,7 +2411,102 @@
           <a:lstStyle/>
           <a:p>
             <a:r>
-              <a:t>Add the Uganda Healthsites file and put a map visual on it. Notice what that file makes easy and what it makes impossible.</a:t>
+              <a:t>TEACHING PURPOSE</a:t>
+            </a:r>
+          </a:p>
+          <a:p>
+            <a:r>
+              <a:t>Load it, model it, reconcile it continued</a:t>
+            </a:r>
+          </a:p>
+          <a:p>
+            <a:r>
+              <a:t/>
+            </a:r>
+          </a:p>
+          <a:p>
+            <a:r>
+              <a:t>CONNECT</a:t>
+            </a:r>
+          </a:p>
+          <a:p>
+            <a:r>
+              <a:t>Build on the preceding slide: Load it, model it, reconcile it.</a:t>
+            </a:r>
+          </a:p>
+          <a:p>
+            <a:r>
+              <a:t/>
+            </a:r>
+          </a:p>
+          <a:p>
+            <a:r>
+              <a:t>LECTURER CUE</a:t>
+            </a:r>
+          </a:p>
+          <a:p>
+            <a:r>
+              <a:t>Five tables in, five relationships built by hand, a date table marked and sorted, and three visuals whose totals match the numbers you already got from SQL and pandas. Reconciliation is your practice check.</a:t>
+            </a:r>
+          </a:p>
+          <a:p>
+            <a:r>
+              <a:t/>
+            </a:r>
+          </a:p>
+          <a:p>
+            <a:r>
+              <a:t>EXPLAIN IN ORDINARY WORDS</a:t>
+            </a:r>
+          </a:p>
+          <a:p>
+            <a:r>
+              <a:t>Grain means what one row represents. A key identifies a row; a primary key may use more than one column. A join matches keys, and multiple matches can multiply rows.</a:t>
+            </a:r>
+          </a:p>
+          <a:p>
+            <a:r>
+              <a:t/>
+            </a:r>
+          </a:p>
+          <a:p>
+            <a:r>
+              <a:t>CHECK AND EXPECTED ANSWER</a:t>
+            </a:r>
+          </a:p>
+          <a:p>
+            <a:r>
+              <a:t>One order has two lines. After joining orders to lines, how many rows for it? Two. Summing a repeated order-level total would double-count.</a:t>
+            </a:r>
+          </a:p>
+          <a:p>
+            <a:r>
+              <a:t/>
+            </a:r>
+          </a:p>
+          <a:p>
+            <a:r>
+              <a:t>IF LEARNERS ARE STUCK</a:t>
+            </a:r>
+          </a:p>
+          <a:p>
+            <a:r>
+              <a:t>Write one example row from each table. Circle keys and trace each match. Aggregate to the intended grain and check counts and totals.</a:t>
+            </a:r>
+          </a:p>
+          <a:p>
+            <a:r>
+              <a:t/>
+            </a:r>
+          </a:p>
+          <a:p>
+            <a:r>
+              <a:t>NEXT</a:t>
+            </a:r>
+          </a:p>
+          <a:p>
+            <a:r>
+              <a:t>What you can do now. Move on after a learner can explain the current example or required action.</a:t>
             </a:r>
           </a:p>
         </p:txBody>
@@ -1440,8 +2531,8 @@
 </p:notes>
 </file>
 
-<file path=ppt/notesSlides/notesSlide22.xml><?xml version="1.0" encoding="utf-8"?>
-<p:notes xmlns:a="http://schemas.openxmlformats.org/drawingml/2006/main" xmlns:p="http://schemas.openxmlformats.org/presentationml/2006/main" xmlns:r="http://schemas.openxmlformats.org/officeDocument/2006/relationships">
+<file path=ppt/notesSlides/notesSlide2.xml><?xml version="1.0" encoding="utf-8"?>
+<p:notes xmlns:a="http://schemas.openxmlformats.org/drawingml/2006/main" xmlns:p="http://schemas.openxmlformats.org/presentationml/2006/main">
   <p:cSld>
     <p:spTree>
       <p:nvGrpSpPr>
@@ -1485,7 +2576,102 @@
           <a:lstStyle/>
           <a:p>
             <a:r>
-              <a:t>Visuals are half an hour of work. The model is the difference between a dashboard and a liability. Get the arrows right, then make it look good.</a:t>
+              <a:t>TEACHING PURPOSE</a:t>
+            </a:r>
+          </a:p>
+          <a:p>
+            <a:r>
+              <a:t>Where tonight sits</a:t>
+            </a:r>
+          </a:p>
+          <a:p>
+            <a:r>
+              <a:t/>
+            </a:r>
+          </a:p>
+          <a:p>
+            <a:r>
+              <a:t>CONNECT</a:t>
+            </a:r>
+          </a:p>
+          <a:p>
+            <a:r>
+              <a:t>Build on the preceding slide: Getting data in, and modelling it.</a:t>
+            </a:r>
+          </a:p>
+          <a:p>
+            <a:r>
+              <a:t/>
+            </a:r>
+          </a:p>
+          <a:p>
+            <a:r>
+              <a:t>LECTURER CUE</a:t>
+            </a:r>
+          </a:p>
+          <a:p>
+            <a:r>
+              <a:t>Tonight is session 14 of fifteen.</a:t>
+            </a:r>
+          </a:p>
+          <a:p>
+            <a:r>
+              <a:t/>
+            </a:r>
+          </a:p>
+          <a:p>
+            <a:r>
+              <a:t>EXPLAIN IN ORDINARY WORDS</a:t>
+            </a:r>
+          </a:p>
+          <a:p>
+            <a:r>
+              <a:t>Grain means what one row represents. A key identifies a row; a primary key may use more than one column. A join matches keys, and multiple matches can multiply rows.</a:t>
+            </a:r>
+          </a:p>
+          <a:p>
+            <a:r>
+              <a:t/>
+            </a:r>
+          </a:p>
+          <a:p>
+            <a:r>
+              <a:t>CHECK AND EXPECTED ANSWER</a:t>
+            </a:r>
+          </a:p>
+          <a:p>
+            <a:r>
+              <a:t>One order has two lines. After joining orders to lines, how many rows for it? Two. Summing a repeated order-level total would double-count.</a:t>
+            </a:r>
+          </a:p>
+          <a:p>
+            <a:r>
+              <a:t/>
+            </a:r>
+          </a:p>
+          <a:p>
+            <a:r>
+              <a:t>IF LEARNERS ARE STUCK</a:t>
+            </a:r>
+          </a:p>
+          <a:p>
+            <a:r>
+              <a:t>Write one example row from each table. Circle keys and trace each match. Aggregate to the intended grain and check counts and totals.</a:t>
+            </a:r>
+          </a:p>
+          <a:p>
+            <a:r>
+              <a:t/>
+            </a:r>
+          </a:p>
+          <a:p>
+            <a:r>
+              <a:t>NEXT</a:t>
+            </a:r>
+          </a:p>
+          <a:p>
+            <a:r>
+              <a:t>The words for tonight. Move on after a learner can explain the current example or required action.</a:t>
             </a:r>
           </a:p>
         </p:txBody>
@@ -1510,8 +2696,8 @@
 </p:notes>
 </file>
 
-<file path=ppt/notesSlides/notesSlide3.xml><?xml version="1.0" encoding="utf-8"?>
-<p:notes xmlns:a="http://schemas.openxmlformats.org/drawingml/2006/main" xmlns:p="http://schemas.openxmlformats.org/presentationml/2006/main" xmlns:r="http://schemas.openxmlformats.org/officeDocument/2006/relationships">
+<file path=ppt/notesSlides/notesSlide20.xml><?xml version="1.0" encoding="utf-8"?>
+<p:notes xmlns:a="http://schemas.openxmlformats.org/drawingml/2006/main" xmlns:p="http://schemas.openxmlformats.org/presentationml/2006/main">
   <p:cSld>
     <p:spTree>
       <p:nvGrpSpPr>
@@ -1553,7 +2739,91 @@
         <p:txBody>
           <a:bodyPr/>
           <a:lstStyle/>
-          <a:p/>
+          <a:p>
+            <a:r>
+              <a:t>TEACHING PURPOSE</a:t>
+            </a:r>
+          </a:p>
+          <a:p>
+            <a:r>
+              <a:t>What you can do now</a:t>
+            </a:r>
+          </a:p>
+          <a:p>
+            <a:r>
+              <a:t/>
+            </a:r>
+          </a:p>
+          <a:p>
+            <a:r>
+              <a:t>CONNECT</a:t>
+            </a:r>
+          </a:p>
+          <a:p>
+            <a:r>
+              <a:t>Build on the preceding slide: Load it, model it, reconcile it continued.</a:t>
+            </a:r>
+          </a:p>
+          <a:p>
+            <a:r>
+              <a:t/>
+            </a:r>
+          </a:p>
+          <a:p>
+            <a:r>
+              <a:t>EXPLAIN IN ORDINARY WORDS</a:t>
+            </a:r>
+          </a:p>
+          <a:p>
+            <a:r>
+              <a:t>Begin with the question and intended comparison. Identify what an axis, bar, point or colour represents, including its unit. A chart summarises data and may hide variation.</a:t>
+            </a:r>
+          </a:p>
+          <a:p>
+            <a:r>
+              <a:t/>
+            </a:r>
+          </a:p>
+          <a:p>
+            <a:r>
+              <a:t>CHECK AND EXPECTED ANSWER</a:t>
+            </a:r>
+          </a:p>
+          <a:p>
+            <a:r>
+              <a:t>For a bar chart comparing amounts, why normally start the value axis at zero? Bar length encodes magnitude; truncation can exaggerate differences.</a:t>
+            </a:r>
+          </a:p>
+          <a:p>
+            <a:r>
+              <a:t/>
+            </a:r>
+          </a:p>
+          <a:p>
+            <a:r>
+              <a:t>IF LEARNERS ARE STUCK</a:t>
+            </a:r>
+          </a:p>
+          <a:p>
+            <a:r>
+              <a:t>Read one mark aloud as a sentence. Check the population, period, filters and units before stating the finding.</a:t>
+            </a:r>
+          </a:p>
+          <a:p>
+            <a:r>
+              <a:t/>
+            </a:r>
+          </a:p>
+          <a:p>
+            <a:r>
+              <a:t>NEXT</a:t>
+            </a:r>
+          </a:p>
+          <a:p>
+            <a:r>
+              <a:t>Before the next session. Move on after a learner can explain the current example or required action.</a:t>
+            </a:r>
+          </a:p>
         </p:txBody>
       </p:sp>
       <p:sp>
@@ -1576,8 +2846,8 @@
 </p:notes>
 </file>
 
-<file path=ppt/notesSlides/notesSlide4.xml><?xml version="1.0" encoding="utf-8"?>
-<p:notes xmlns:a="http://schemas.openxmlformats.org/drawingml/2006/main" xmlns:p="http://schemas.openxmlformats.org/presentationml/2006/main" xmlns:r="http://schemas.openxmlformats.org/officeDocument/2006/relationships">
+<file path=ppt/notesSlides/notesSlide21.xml><?xml version="1.0" encoding="utf-8"?>
+<p:notes xmlns:a="http://schemas.openxmlformats.org/drawingml/2006/main" xmlns:p="http://schemas.openxmlformats.org/presentationml/2006/main">
   <p:cSld>
     <p:spTree>
       <p:nvGrpSpPr>
@@ -1621,7 +2891,102 @@
           <a:lstStyle/>
           <a:p>
             <a:r>
-              <a:t>These three are what tonight is marked against, in the sense that the lab checks them.</a:t>
+              <a:t>TEACHING PURPOSE</a:t>
+            </a:r>
+          </a:p>
+          <a:p>
+            <a:r>
+              <a:t>Before the next session</a:t>
+            </a:r>
+          </a:p>
+          <a:p>
+            <a:r>
+              <a:t/>
+            </a:r>
+          </a:p>
+          <a:p>
+            <a:r>
+              <a:t>CONNECT</a:t>
+            </a:r>
+          </a:p>
+          <a:p>
+            <a:r>
+              <a:t>Build on the preceding slide: What you can do now.</a:t>
+            </a:r>
+          </a:p>
+          <a:p>
+            <a:r>
+              <a:t/>
+            </a:r>
+          </a:p>
+          <a:p>
+            <a:r>
+              <a:t>LECTURER CUE</a:t>
+            </a:r>
+          </a:p>
+          <a:p>
+            <a:r>
+              <a:t>Add the Uganda Healthsites file and put a map visual on it. Notice what that file makes easy and what it makes impossible.</a:t>
+            </a:r>
+          </a:p>
+          <a:p>
+            <a:r>
+              <a:t/>
+            </a:r>
+          </a:p>
+          <a:p>
+            <a:r>
+              <a:t>EXPLAIN IN ORDINARY WORDS</a:t>
+            </a:r>
+          </a:p>
+          <a:p>
+            <a:r>
+              <a:t>Begin with the question and intended comparison. Identify what an axis, bar, point or colour represents, including its unit. A chart summarises data and may hide variation.</a:t>
+            </a:r>
+          </a:p>
+          <a:p>
+            <a:r>
+              <a:t/>
+            </a:r>
+          </a:p>
+          <a:p>
+            <a:r>
+              <a:t>CHECK AND EXPECTED ANSWER</a:t>
+            </a:r>
+          </a:p>
+          <a:p>
+            <a:r>
+              <a:t>For a bar chart comparing amounts, why normally start the value axis at zero? Bar length encodes magnitude; truncation can exaggerate differences.</a:t>
+            </a:r>
+          </a:p>
+          <a:p>
+            <a:r>
+              <a:t/>
+            </a:r>
+          </a:p>
+          <a:p>
+            <a:r>
+              <a:t>IF LEARNERS ARE STUCK</a:t>
+            </a:r>
+          </a:p>
+          <a:p>
+            <a:r>
+              <a:t>Read one mark aloud as a sentence. Check the population, period, filters and units before stating the finding.</a:t>
+            </a:r>
+          </a:p>
+          <a:p>
+            <a:r>
+              <a:t/>
+            </a:r>
+          </a:p>
+          <a:p>
+            <a:r>
+              <a:t>NEXT</a:t>
+            </a:r>
+          </a:p>
+          <a:p>
+            <a:r>
+              <a:t>The model decides whether the report is true. Move on after a learner can explain the current example or required action.</a:t>
             </a:r>
           </a:p>
         </p:txBody>
@@ -1646,8 +3011,8 @@
 </p:notes>
 </file>
 
-<file path=ppt/notesSlides/notesSlide5.xml><?xml version="1.0" encoding="utf-8"?>
-<p:notes xmlns:a="http://schemas.openxmlformats.org/drawingml/2006/main" xmlns:p="http://schemas.openxmlformats.org/presentationml/2006/main" xmlns:r="http://schemas.openxmlformats.org/officeDocument/2006/relationships">
+<file path=ppt/notesSlides/notesSlide22.xml><?xml version="1.0" encoding="utf-8"?>
+<p:notes xmlns:a="http://schemas.openxmlformats.org/drawingml/2006/main" xmlns:p="http://schemas.openxmlformats.org/presentationml/2006/main">
   <p:cSld>
     <p:spTree>
       <p:nvGrpSpPr>
@@ -1691,7 +3056,87 @@
           <a:lstStyle/>
           <a:p>
             <a:r>
-              <a:t>Almost always the model: one relationship pointing the wrong way, or no date table.</a:t>
+              <a:t>TEACHING PURPOSE</a:t>
+            </a:r>
+          </a:p>
+          <a:p>
+            <a:r>
+              <a:t>The model decides whether the report is true</a:t>
+            </a:r>
+          </a:p>
+          <a:p>
+            <a:r>
+              <a:t/>
+            </a:r>
+          </a:p>
+          <a:p>
+            <a:r>
+              <a:t>CONNECT</a:t>
+            </a:r>
+          </a:p>
+          <a:p>
+            <a:r>
+              <a:t>Build on the preceding slide: Before the next session.</a:t>
+            </a:r>
+          </a:p>
+          <a:p>
+            <a:r>
+              <a:t/>
+            </a:r>
+          </a:p>
+          <a:p>
+            <a:r>
+              <a:t>LECTURER CUE</a:t>
+            </a:r>
+          </a:p>
+          <a:p>
+            <a:r>
+              <a:t>Visuals are half an hour of work. The model is the difference between a dashboard and a liability. Get the arrows right, then make it look good.</a:t>
+            </a:r>
+          </a:p>
+          <a:p>
+            <a:r>
+              <a:t/>
+            </a:r>
+          </a:p>
+          <a:p>
+            <a:r>
+              <a:t>EXPLAIN IN ORDINARY WORDS</a:t>
+            </a:r>
+          </a:p>
+          <a:p>
+            <a:r>
+              <a:t>Begin with the question and intended comparison. Identify what an axis, bar, point or colour represents, including its unit. A chart summarises data and may hide variation.</a:t>
+            </a:r>
+          </a:p>
+          <a:p>
+            <a:r>
+              <a:t/>
+            </a:r>
+          </a:p>
+          <a:p>
+            <a:r>
+              <a:t>CHECK AND EXPECTED ANSWER</a:t>
+            </a:r>
+          </a:p>
+          <a:p>
+            <a:r>
+              <a:t>For a bar chart comparing amounts, why normally start the value axis at zero? Bar length encodes magnitude; truncation can exaggerate differences.</a:t>
+            </a:r>
+          </a:p>
+          <a:p>
+            <a:r>
+              <a:t/>
+            </a:r>
+          </a:p>
+          <a:p>
+            <a:r>
+              <a:t>IF LEARNERS ARE STUCK</a:t>
+            </a:r>
+          </a:p>
+          <a:p>
+            <a:r>
+              <a:t>Read one mark aloud as a sentence. Check the population, period, filters and units before stating the finding.</a:t>
             </a:r>
           </a:p>
         </p:txBody>
@@ -1716,8 +3161,8 @@
 </p:notes>
 </file>
 
-<file path=ppt/notesSlides/notesSlide6.xml><?xml version="1.0" encoding="utf-8"?>
-<p:notes xmlns:a="http://schemas.openxmlformats.org/drawingml/2006/main" xmlns:p="http://schemas.openxmlformats.org/presentationml/2006/main" xmlns:r="http://schemas.openxmlformats.org/officeDocument/2006/relationships">
+<file path=ppt/notesSlides/notesSlide3.xml><?xml version="1.0" encoding="utf-8"?>
+<p:notes xmlns:a="http://schemas.openxmlformats.org/drawingml/2006/main" xmlns:p="http://schemas.openxmlformats.org/presentationml/2006/main">
   <p:cSld>
     <p:spTree>
       <p:nvGrpSpPr>
@@ -1759,7 +3204,91 @@
         <p:txBody>
           <a:bodyPr/>
           <a:lstStyle/>
-          <a:p/>
+          <a:p>
+            <a:r>
+              <a:t>TEACHING PURPOSE</a:t>
+            </a:r>
+          </a:p>
+          <a:p>
+            <a:r>
+              <a:t>The words for tonight</a:t>
+            </a:r>
+          </a:p>
+          <a:p>
+            <a:r>
+              <a:t/>
+            </a:r>
+          </a:p>
+          <a:p>
+            <a:r>
+              <a:t>CONNECT</a:t>
+            </a:r>
+          </a:p>
+          <a:p>
+            <a:r>
+              <a:t>Build on the preceding slide: Where tonight sits.</a:t>
+            </a:r>
+          </a:p>
+          <a:p>
+            <a:r>
+              <a:t/>
+            </a:r>
+          </a:p>
+          <a:p>
+            <a:r>
+              <a:t>EXPLAIN IN ORDINARY WORDS</a:t>
+            </a:r>
+          </a:p>
+          <a:p>
+            <a:r>
+              <a:t>Grain means what one row represents. A key identifies a row; a primary key may use more than one column. A join matches keys, and multiple matches can multiply rows.</a:t>
+            </a:r>
+          </a:p>
+          <a:p>
+            <a:r>
+              <a:t/>
+            </a:r>
+          </a:p>
+          <a:p>
+            <a:r>
+              <a:t>CHECK AND EXPECTED ANSWER</a:t>
+            </a:r>
+          </a:p>
+          <a:p>
+            <a:r>
+              <a:t>One order has two lines. After joining orders to lines, how many rows for it? Two. Summing a repeated order-level total would double-count.</a:t>
+            </a:r>
+          </a:p>
+          <a:p>
+            <a:r>
+              <a:t/>
+            </a:r>
+          </a:p>
+          <a:p>
+            <a:r>
+              <a:t>IF LEARNERS ARE STUCK</a:t>
+            </a:r>
+          </a:p>
+          <a:p>
+            <a:r>
+              <a:t>Write one example row from each table. Circle keys and trace each match. Aggregate to the intended grain and check counts and totals.</a:t>
+            </a:r>
+          </a:p>
+          <a:p>
+            <a:r>
+              <a:t/>
+            </a:r>
+          </a:p>
+          <a:p>
+            <a:r>
+              <a:t>NEXT</a:t>
+            </a:r>
+          </a:p>
+          <a:p>
+            <a:r>
+              <a:t>By the end of tonight you can…. Move on after a learner can explain the current example or required action.</a:t>
+            </a:r>
+          </a:p>
         </p:txBody>
       </p:sp>
       <p:sp>
@@ -1782,8 +3311,8 @@
 </p:notes>
 </file>
 
-<file path=ppt/notesSlides/notesSlide7.xml><?xml version="1.0" encoding="utf-8"?>
-<p:notes xmlns:a="http://schemas.openxmlformats.org/drawingml/2006/main" xmlns:p="http://schemas.openxmlformats.org/presentationml/2006/main" xmlns:r="http://schemas.openxmlformats.org/officeDocument/2006/relationships">
+<file path=ppt/notesSlides/notesSlide4.xml><?xml version="1.0" encoding="utf-8"?>
+<p:notes xmlns:a="http://schemas.openxmlformats.org/drawingml/2006/main" xmlns:p="http://schemas.openxmlformats.org/presentationml/2006/main">
   <p:cSld>
     <p:spTree>
       <p:nvGrpSpPr>
@@ -1827,7 +3356,102 @@
           <a:lstStyle/>
           <a:p>
             <a:r>
-              <a:t>The tables plus the relationships between them, defined once, so you do not write a join in every query.</a:t>
+              <a:t>TEACHING PURPOSE</a:t>
+            </a:r>
+          </a:p>
+          <a:p>
+            <a:r>
+              <a:t>By the end of tonight you can…</a:t>
+            </a:r>
+          </a:p>
+          <a:p>
+            <a:r>
+              <a:t/>
+            </a:r>
+          </a:p>
+          <a:p>
+            <a:r>
+              <a:t>CONNECT</a:t>
+            </a:r>
+          </a:p>
+          <a:p>
+            <a:r>
+              <a:t>Build on the preceding slide: The words for tonight.</a:t>
+            </a:r>
+          </a:p>
+          <a:p>
+            <a:r>
+              <a:t/>
+            </a:r>
+          </a:p>
+          <a:p>
+            <a:r>
+              <a:t>LECTURER CUE</a:t>
+            </a:r>
+          </a:p>
+          <a:p>
+            <a:r>
+              <a:t>These three are what tonight is marked against, in the sense that the lab checks them.</a:t>
+            </a:r>
+          </a:p>
+          <a:p>
+            <a:r>
+              <a:t/>
+            </a:r>
+          </a:p>
+          <a:p>
+            <a:r>
+              <a:t>EXPLAIN IN ORDINARY WORDS</a:t>
+            </a:r>
+          </a:p>
+          <a:p>
+            <a:r>
+              <a:t>Begin with the question and intended comparison. Identify what an axis, bar, point or colour represents, including its unit. A chart summarises data and may hide variation.</a:t>
+            </a:r>
+          </a:p>
+          <a:p>
+            <a:r>
+              <a:t/>
+            </a:r>
+          </a:p>
+          <a:p>
+            <a:r>
+              <a:t>CHECK AND EXPECTED ANSWER</a:t>
+            </a:r>
+          </a:p>
+          <a:p>
+            <a:r>
+              <a:t>For a bar chart comparing amounts, why normally start the value axis at zero? Bar length encodes magnitude; truncation can exaggerate differences.</a:t>
+            </a:r>
+          </a:p>
+          <a:p>
+            <a:r>
+              <a:t/>
+            </a:r>
+          </a:p>
+          <a:p>
+            <a:r>
+              <a:t>IF LEARNERS ARE STUCK</a:t>
+            </a:r>
+          </a:p>
+          <a:p>
+            <a:r>
+              <a:t>Read one mark aloud as a sentence. Check the population, period, filters and units before stating the finding.</a:t>
+            </a:r>
+          </a:p>
+          <a:p>
+            <a:r>
+              <a:t/>
+            </a:r>
+          </a:p>
+          <a:p>
+            <a:r>
+              <a:t>NEXT</a:t>
+            </a:r>
+          </a:p>
+          <a:p>
+            <a:r>
+              <a:t>Why does a Power BI total come out wrong. Move on after a learner can explain the current example or required action.</a:t>
             </a:r>
           </a:p>
         </p:txBody>
@@ -1852,8 +3476,8 @@
 </p:notes>
 </file>
 
-<file path=ppt/notesSlides/notesSlide8.xml><?xml version="1.0" encoding="utf-8"?>
-<p:notes xmlns:a="http://schemas.openxmlformats.org/drawingml/2006/main" xmlns:p="http://schemas.openxmlformats.org/presentationml/2006/main" xmlns:r="http://schemas.openxmlformats.org/officeDocument/2006/relationships">
+<file path=ppt/notesSlides/notesSlide5.xml><?xml version="1.0" encoding="utf-8"?>
+<p:notes xmlns:a="http://schemas.openxmlformats.org/drawingml/2006/main" xmlns:p="http://schemas.openxmlformats.org/presentationml/2006/main">
   <p:cSld>
     <p:spTree>
       <p:nvGrpSpPr>
@@ -1897,7 +3521,102 @@
           <a:lstStyle/>
           <a:p>
             <a:r>
-              <a:t>One fact table in the middle holding the events, with dimension tables around it holding the descriptions you slice by. Every dimension points INTO the fact, one-to-many.</a:t>
+              <a:t>TEACHING PURPOSE</a:t>
+            </a:r>
+          </a:p>
+          <a:p>
+            <a:r>
+              <a:t>Why does a Power BI total come out wrong</a:t>
+            </a:r>
+          </a:p>
+          <a:p>
+            <a:r>
+              <a:t/>
+            </a:r>
+          </a:p>
+          <a:p>
+            <a:r>
+              <a:t>CONNECT</a:t>
+            </a:r>
+          </a:p>
+          <a:p>
+            <a:r>
+              <a:t>Build on the preceding slide: By the end of tonight you can….</a:t>
+            </a:r>
+          </a:p>
+          <a:p>
+            <a:r>
+              <a:t/>
+            </a:r>
+          </a:p>
+          <a:p>
+            <a:r>
+              <a:t>LECTURER CUE</a:t>
+            </a:r>
+          </a:p>
+          <a:p>
+            <a:r>
+              <a:t>Almost always the model: one relationship pointing the wrong way, or no date table.</a:t>
+            </a:r>
+          </a:p>
+          <a:p>
+            <a:r>
+              <a:t/>
+            </a:r>
+          </a:p>
+          <a:p>
+            <a:r>
+              <a:t>EXPLAIN IN ORDINARY WORDS</a:t>
+            </a:r>
+          </a:p>
+          <a:p>
+            <a:r>
+              <a:t>An observation describes the data. A finding answers a defined question with evidence. A recommendation adds an action, its justification and limits.</a:t>
+            </a:r>
+          </a:p>
+          <a:p>
+            <a:r>
+              <a:t/>
+            </a:r>
+          </a:p>
+          <a:p>
+            <a:r>
+              <a:t>CHECK AND EXPECTED ANSWER</a:t>
+            </a:r>
+          </a:p>
+          <a:p>
+            <a:r>
+              <a:t>Does a difference between two groups prove one caused the other? No. Other differences or selection may explain it.</a:t>
+            </a:r>
+          </a:p>
+          <a:p>
+            <a:r>
+              <a:t/>
+            </a:r>
+          </a:p>
+          <a:p>
+            <a:r>
+              <a:t>IF LEARNERS ARE STUCK</a:t>
+            </a:r>
+          </a:p>
+          <a:p>
+            <a:r>
+              <a:t>Ask for the population, time period, number and comparison. Then ask what additional evidence could change the recommendation.</a:t>
+            </a:r>
+          </a:p>
+          <a:p>
+            <a:r>
+              <a:t/>
+            </a:r>
+          </a:p>
+          <a:p>
+            <a:r>
+              <a:t>NEXT</a:t>
+            </a:r>
+          </a:p>
+          <a:p>
+            <a:r>
+              <a:t>Power Query: get it in, shape it, keep the recipe. Move on after a learner can explain the current example or required action.</a:t>
             </a:r>
           </a:p>
         </p:txBody>
@@ -1922,8 +3641,8 @@
 </p:notes>
 </file>
 
-<file path=ppt/notesSlides/notesSlide9.xml><?xml version="1.0" encoding="utf-8"?>
-<p:notes xmlns:a="http://schemas.openxmlformats.org/drawingml/2006/main" xmlns:p="http://schemas.openxmlformats.org/presentationml/2006/main" xmlns:r="http://schemas.openxmlformats.org/officeDocument/2006/relationships">
+<file path=ppt/notesSlides/notesSlide6.xml><?xml version="1.0" encoding="utf-8"?>
+<p:notes xmlns:a="http://schemas.openxmlformats.org/drawingml/2006/main" xmlns:p="http://schemas.openxmlformats.org/presentationml/2006/main">
   <p:cSld>
     <p:spTree>
       <p:nvGrpSpPr>
@@ -1967,7 +3686,537 @@
           <a:lstStyle/>
           <a:p>
             <a:r>
+              <a:t>TEACHING PURPOSE</a:t>
+            </a:r>
+          </a:p>
+          <a:p>
+            <a:r>
+              <a:t>Power BI is three products, and people confuse them</a:t>
+            </a:r>
+          </a:p>
+          <a:p>
+            <a:r>
+              <a:t/>
+            </a:r>
+          </a:p>
+          <a:p>
+            <a:r>
+              <a:t>CONNECT</a:t>
+            </a:r>
+          </a:p>
+          <a:p>
+            <a:r>
+              <a:t>Build on the preceding slide: Power Query: get it in, shape it, keep the recipe.</a:t>
+            </a:r>
+          </a:p>
+          <a:p>
+            <a:r>
+              <a:t/>
+            </a:r>
+          </a:p>
+          <a:p>
+            <a:r>
+              <a:t>EXPLAIN IN ORDINARY WORDS</a:t>
+            </a:r>
+          </a:p>
+          <a:p>
+            <a:r>
+              <a:t>Grain means what one row represents. A key identifies a row; a primary key may use more than one column. A join matches keys, and multiple matches can multiply rows.</a:t>
+            </a:r>
+          </a:p>
+          <a:p>
+            <a:r>
+              <a:t/>
+            </a:r>
+          </a:p>
+          <a:p>
+            <a:r>
+              <a:t>CHECK AND EXPECTED ANSWER</a:t>
+            </a:r>
+          </a:p>
+          <a:p>
+            <a:r>
+              <a:t>One order has two lines. After joining orders to lines, how many rows for it? Two. Summing a repeated order-level total would double-count.</a:t>
+            </a:r>
+          </a:p>
+          <a:p>
+            <a:r>
+              <a:t/>
+            </a:r>
+          </a:p>
+          <a:p>
+            <a:r>
+              <a:t>IF LEARNERS ARE STUCK</a:t>
+            </a:r>
+          </a:p>
+          <a:p>
+            <a:r>
+              <a:t>Write one example row from each table. Circle keys and trace each match. Aggregate to the intended grain and check counts and totals.</a:t>
+            </a:r>
+          </a:p>
+          <a:p>
+            <a:r>
+              <a:t/>
+            </a:r>
+          </a:p>
+          <a:p>
+            <a:r>
+              <a:t>NEXT</a:t>
+            </a:r>
+          </a:p>
+          <a:p>
+            <a:r>
+              <a:t>A data model. Move on after a learner can explain the current example or required action.</a:t>
+            </a:r>
+          </a:p>
+        </p:txBody>
+      </p:sp>
+      <p:sp>
+        <p:nvSpPr>
+          <p:cNvPr id="4" name="Slide Number Placeholder 3"/>
+          <p:cNvSpPr>
+            <a:spLocks noGrp="1"/>
+          </p:cNvSpPr>
+          <p:nvPr>
+            <p:ph type="sldNum" idx="5" sz="quarter"/>
+          </p:nvPr>
+        </p:nvSpPr>
+        <p:spPr/>
+      </p:sp>
+    </p:spTree>
+  </p:cSld>
+  <p:clrMapOvr>
+    <a:masterClrMapping/>
+  </p:clrMapOvr>
+</p:notes>
+</file>
+
+<file path=ppt/notesSlides/notesSlide7.xml><?xml version="1.0" encoding="utf-8"?>
+<p:notes xmlns:a="http://schemas.openxmlformats.org/drawingml/2006/main" xmlns:p="http://schemas.openxmlformats.org/presentationml/2006/main">
+  <p:cSld>
+    <p:spTree>
+      <p:nvGrpSpPr>
+        <p:cNvPr id="1" name=""/>
+        <p:cNvGrpSpPr/>
+        <p:nvPr/>
+      </p:nvGrpSpPr>
+      <p:grpSpPr>
+        <a:xfrm>
+          <a:off x="0" y="0"/>
+          <a:ext cx="0" cy="0"/>
+          <a:chOff x="0" y="0"/>
+          <a:chExt cx="0" cy="0"/>
+        </a:xfrm>
+      </p:grpSpPr>
+      <p:sp>
+        <p:nvSpPr>
+          <p:cNvPr id="2" name="Slide Image Placeholder 1"/>
+          <p:cNvSpPr>
+            <a:spLocks noGrp="1"/>
+          </p:cNvSpPr>
+          <p:nvPr>
+            <p:ph type="sldImg" idx="2"/>
+          </p:nvPr>
+        </p:nvSpPr>
+        <p:spPr/>
+      </p:sp>
+      <p:sp>
+        <p:nvSpPr>
+          <p:cNvPr id="3" name="Notes Placeholder 2"/>
+          <p:cNvSpPr>
+            <a:spLocks noGrp="1"/>
+          </p:cNvSpPr>
+          <p:nvPr>
+            <p:ph type="body" idx="3" sz="quarter"/>
+          </p:nvPr>
+        </p:nvSpPr>
+        <p:spPr/>
+        <p:txBody>
+          <a:bodyPr/>
+          <a:lstStyle/>
+          <a:p>
+            <a:r>
+              <a:t>TEACHING PURPOSE</a:t>
+            </a:r>
+          </a:p>
+          <a:p>
+            <a:r>
+              <a:t>A data model</a:t>
+            </a:r>
+          </a:p>
+          <a:p>
+            <a:r>
+              <a:t/>
+            </a:r>
+          </a:p>
+          <a:p>
+            <a:r>
+              <a:t>CONNECT</a:t>
+            </a:r>
+          </a:p>
+          <a:p>
+            <a:r>
+              <a:t>Build on the preceding slide: Power BI is three products, and people confuse them.</a:t>
+            </a:r>
+          </a:p>
+          <a:p>
+            <a:r>
+              <a:t/>
+            </a:r>
+          </a:p>
+          <a:p>
+            <a:r>
+              <a:t>LECTURER CUE</a:t>
+            </a:r>
+          </a:p>
+          <a:p>
+            <a:r>
+              <a:t>The tables plus the relationships between them, defined once, so you do not write a join in every query.</a:t>
+            </a:r>
+          </a:p>
+          <a:p>
+            <a:r>
+              <a:t/>
+            </a:r>
+          </a:p>
+          <a:p>
+            <a:r>
+              <a:t>EXPLAIN IN ORDINARY WORDS</a:t>
+            </a:r>
+          </a:p>
+          <a:p>
+            <a:r>
+              <a:t>Grain means what one row represents. A key identifies a row; a primary key may use more than one column. A join matches keys, and multiple matches can multiply rows.</a:t>
+            </a:r>
+          </a:p>
+          <a:p>
+            <a:r>
+              <a:t/>
+            </a:r>
+          </a:p>
+          <a:p>
+            <a:r>
+              <a:t>CHECK AND EXPECTED ANSWER</a:t>
+            </a:r>
+          </a:p>
+          <a:p>
+            <a:r>
+              <a:t>One order has two lines. After joining orders to lines, how many rows for it? Two. Summing a repeated order-level total would double-count.</a:t>
+            </a:r>
+          </a:p>
+          <a:p>
+            <a:r>
+              <a:t/>
+            </a:r>
+          </a:p>
+          <a:p>
+            <a:r>
+              <a:t>IF LEARNERS ARE STUCK</a:t>
+            </a:r>
+          </a:p>
+          <a:p>
+            <a:r>
+              <a:t>Write one example row from each table. Circle keys and trace each match. Aggregate to the intended grain and check counts and totals.</a:t>
+            </a:r>
+          </a:p>
+          <a:p>
+            <a:r>
+              <a:t/>
+            </a:r>
+          </a:p>
+          <a:p>
+            <a:r>
+              <a:t>NEXT</a:t>
+            </a:r>
+          </a:p>
+          <a:p>
+            <a:r>
+              <a:t>A star schema. Move on after a learner can explain the current example or required action.</a:t>
+            </a:r>
+          </a:p>
+        </p:txBody>
+      </p:sp>
+      <p:sp>
+        <p:nvSpPr>
+          <p:cNvPr id="4" name="Slide Number Placeholder 3"/>
+          <p:cNvSpPr>
+            <a:spLocks noGrp="1"/>
+          </p:cNvSpPr>
+          <p:nvPr>
+            <p:ph type="sldNum" idx="5" sz="quarter"/>
+          </p:nvPr>
+        </p:nvSpPr>
+        <p:spPr/>
+      </p:sp>
+    </p:spTree>
+  </p:cSld>
+  <p:clrMapOvr>
+    <a:masterClrMapping/>
+  </p:clrMapOvr>
+</p:notes>
+</file>
+
+<file path=ppt/notesSlides/notesSlide8.xml><?xml version="1.0" encoding="utf-8"?>
+<p:notes xmlns:a="http://schemas.openxmlformats.org/drawingml/2006/main" xmlns:p="http://schemas.openxmlformats.org/presentationml/2006/main">
+  <p:cSld>
+    <p:spTree>
+      <p:nvGrpSpPr>
+        <p:cNvPr id="1" name=""/>
+        <p:cNvGrpSpPr/>
+        <p:nvPr/>
+      </p:nvGrpSpPr>
+      <p:grpSpPr>
+        <a:xfrm>
+          <a:off x="0" y="0"/>
+          <a:ext cx="0" cy="0"/>
+          <a:chOff x="0" y="0"/>
+          <a:chExt cx="0" cy="0"/>
+        </a:xfrm>
+      </p:grpSpPr>
+      <p:sp>
+        <p:nvSpPr>
+          <p:cNvPr id="2" name="Slide Image Placeholder 1"/>
+          <p:cNvSpPr>
+            <a:spLocks noGrp="1"/>
+          </p:cNvSpPr>
+          <p:nvPr>
+            <p:ph type="sldImg" idx="2"/>
+          </p:nvPr>
+        </p:nvSpPr>
+        <p:spPr/>
+      </p:sp>
+      <p:sp>
+        <p:nvSpPr>
+          <p:cNvPr id="3" name="Notes Placeholder 2"/>
+          <p:cNvSpPr>
+            <a:spLocks noGrp="1"/>
+          </p:cNvSpPr>
+          <p:nvPr>
+            <p:ph type="body" idx="3" sz="quarter"/>
+          </p:nvPr>
+        </p:nvSpPr>
+        <p:spPr/>
+        <p:txBody>
+          <a:bodyPr/>
+          <a:lstStyle/>
+          <a:p>
+            <a:r>
+              <a:t>TEACHING PURPOSE</a:t>
+            </a:r>
+          </a:p>
+          <a:p>
+            <a:r>
+              <a:t>A star schema</a:t>
+            </a:r>
+          </a:p>
+          <a:p>
+            <a:r>
+              <a:t/>
+            </a:r>
+          </a:p>
+          <a:p>
+            <a:r>
+              <a:t>CONNECT</a:t>
+            </a:r>
+          </a:p>
+          <a:p>
+            <a:r>
+              <a:t>Build on the preceding slide: A data model.</a:t>
+            </a:r>
+          </a:p>
+          <a:p>
+            <a:r>
+              <a:t/>
+            </a:r>
+          </a:p>
+          <a:p>
+            <a:r>
+              <a:t>LECTURER CUE</a:t>
+            </a:r>
+          </a:p>
+          <a:p>
+            <a:r>
+              <a:t>One fact table in the middle holding the events, with dimension tables around it holding the descriptions you slice by. Every dimension points INTO the fact, one-to-many.</a:t>
+            </a:r>
+          </a:p>
+          <a:p>
+            <a:r>
+              <a:t/>
+            </a:r>
+          </a:p>
+          <a:p>
+            <a:r>
+              <a:t>EXPLAIN IN ORDINARY WORDS</a:t>
+            </a:r>
+          </a:p>
+          <a:p>
+            <a:r>
+              <a:t>Grain means what one row represents. A key identifies a row; a primary key may use more than one column. A join matches keys, and multiple matches can multiply rows.</a:t>
+            </a:r>
+          </a:p>
+          <a:p>
+            <a:r>
+              <a:t/>
+            </a:r>
+          </a:p>
+          <a:p>
+            <a:r>
+              <a:t>CHECK AND EXPECTED ANSWER</a:t>
+            </a:r>
+          </a:p>
+          <a:p>
+            <a:r>
+              <a:t>One order has two lines. After joining orders to lines, how many rows for it? Two. Summing a repeated order-level total would double-count.</a:t>
+            </a:r>
+          </a:p>
+          <a:p>
+            <a:r>
+              <a:t/>
+            </a:r>
+          </a:p>
+          <a:p>
+            <a:r>
+              <a:t>IF LEARNERS ARE STUCK</a:t>
+            </a:r>
+          </a:p>
+          <a:p>
+            <a:r>
+              <a:t>Write one example row from each table. Circle keys and trace each match. Aggregate to the intended grain and check counts and totals.</a:t>
+            </a:r>
+          </a:p>
+          <a:p>
+            <a:r>
+              <a:t/>
+            </a:r>
+          </a:p>
+          <a:p>
+            <a:r>
+              <a:t>NEXT</a:t>
+            </a:r>
+          </a:p>
+          <a:p>
+            <a:r>
+              <a:t>A date table. Move on after a learner can explain the current example or required action.</a:t>
+            </a:r>
+          </a:p>
+        </p:txBody>
+      </p:sp>
+      <p:sp>
+        <p:nvSpPr>
+          <p:cNvPr id="4" name="Slide Number Placeholder 3"/>
+          <p:cNvSpPr>
+            <a:spLocks noGrp="1"/>
+          </p:cNvSpPr>
+          <p:nvPr>
+            <p:ph type="sldNum" idx="5" sz="quarter"/>
+          </p:nvPr>
+        </p:nvSpPr>
+        <p:spPr/>
+      </p:sp>
+    </p:spTree>
+  </p:cSld>
+  <p:clrMapOvr>
+    <a:masterClrMapping/>
+  </p:clrMapOvr>
+</p:notes>
+</file>
+
+<file path=ppt/notesSlides/notesSlide9.xml><?xml version="1.0" encoding="utf-8"?>
+<p:notes xmlns:a="http://schemas.openxmlformats.org/drawingml/2006/main" xmlns:p="http://schemas.openxmlformats.org/presentationml/2006/main">
+  <p:cSld>
+    <p:spTree>
+      <p:nvGrpSpPr>
+        <p:cNvPr id="1" name=""/>
+        <p:cNvGrpSpPr/>
+        <p:nvPr/>
+      </p:nvGrpSpPr>
+      <p:grpSpPr>
+        <a:xfrm>
+          <a:off x="0" y="0"/>
+          <a:ext cx="0" cy="0"/>
+          <a:chOff x="0" y="0"/>
+          <a:chExt cx="0" cy="0"/>
+        </a:xfrm>
+      </p:grpSpPr>
+      <p:sp>
+        <p:nvSpPr>
+          <p:cNvPr id="2" name="Slide Image Placeholder 1"/>
+          <p:cNvSpPr>
+            <a:spLocks noGrp="1"/>
+          </p:cNvSpPr>
+          <p:nvPr>
+            <p:ph type="sldImg" idx="2"/>
+          </p:nvPr>
+        </p:nvSpPr>
+        <p:spPr/>
+      </p:sp>
+      <p:sp>
+        <p:nvSpPr>
+          <p:cNvPr id="3" name="Notes Placeholder 2"/>
+          <p:cNvSpPr>
+            <a:spLocks noGrp="1"/>
+          </p:cNvSpPr>
+          <p:nvPr>
+            <p:ph type="body" idx="3" sz="quarter"/>
+          </p:nvPr>
+        </p:nvSpPr>
+        <p:spPr/>
+        <p:txBody>
+          <a:bodyPr/>
+          <a:lstStyle/>
+          <a:p>
+            <a:r>
+              <a:t>TEACHING PURPOSE</a:t>
+            </a:r>
+          </a:p>
+          <a:p>
+            <a:r>
+              <a:t>A date table</a:t>
+            </a:r>
+          </a:p>
+          <a:p>
+            <a:r>
+              <a:t/>
+            </a:r>
+          </a:p>
+          <a:p>
+            <a:r>
+              <a:t>CONNECT</a:t>
+            </a:r>
+          </a:p>
+          <a:p>
+            <a:r>
+              <a:t>Build on the preceding slide: A star schema.</a:t>
+            </a:r>
+          </a:p>
+          <a:p>
+            <a:r>
+              <a:t/>
+            </a:r>
+          </a:p>
+          <a:p>
+            <a:r>
+              <a:t>LECTURER CUE</a:t>
+            </a:r>
+          </a:p>
+          <a:p>
+            <a:r>
               <a:t>A separate table with one row per date, marked as the date table and related to your fact's date column.</a:t>
+            </a:r>
+          </a:p>
+          <a:p>
+            <a:r>
+              <a:t/>
+            </a:r>
+          </a:p>
+          <a:p>
+            <a:r>
+              <a:t>NEXT</a:t>
+            </a:r>
+          </a:p>
+          <a:p>
+            <a:r>
+              <a:t>The date table, and the step everybody skips. Move on after a learner can explain the current example or required action.</a:t>
             </a:r>
           </a:p>
         </p:txBody>
@@ -5502,7 +7751,7 @@
                 </a:solidFill>
                 <a:latin typeface="Calibri"/>
               </a:rPr>
-              <a:t>731 days, 1 January 2024 to 31 December 2025. Without it, your months sort alphabetically and April comes first.</a:t>
+              <a:t>731 days, 1 January 2024 to 31 December 2025. Sort the Month names by MonthNo so that January comes first.</a:t>
             </a:r>
           </a:p>
         </p:txBody>
@@ -6521,7 +8770,7 @@
                 </a:solidFill>
                 <a:latin typeface="Calibri"/>
               </a:rPr>
-              <a:t>The model, which is where the marks are. The star schema figure, then five relationships built by hand after deleting every one Power BI guessed. A deliberately wrong relationship first, so the wrong total is seen before</a:t>
+              <a:t>The model: orders links order_items to customers and reps.</a:t>
             </a:r>
           </a:p>
         </p:txBody>
@@ -7034,7 +9283,7 @@
                 </a:solidFill>
                 <a:latin typeface="Calibri"/>
               </a:rPr>
-              <a:t>Dates to orders on order_date</a:t>
+              <a:t>orders[order_date] to Dates[Date]</a:t>
             </a:r>
           </a:p>
         </p:txBody>
@@ -7865,7 +10114,7 @@
                 </a:solidFill>
                 <a:latin typeface="Calibri"/>
               </a:rPr>
-              <a:t>Power BI Desktop is Windows only. Mac participants work in the browser Service throughout, loading CSVs they have already cleaned in pandas; the lab gives both paths and names the three things the browser cannot do.</a:t>
+              <a:t>Power BI Desktop requires Windows. Rehearse the browser semantic-model editor and Power Query with the actual learner account, workspace permissions and tenant settings. Use the CSV lab route; arrange a Windows lab machine if browser editing is unavailable.</a:t>
             </a:r>
           </a:p>
         </p:txBody>
@@ -7980,7 +10229,7 @@
         <p:spPr>
           <a:xfrm>
             <a:off x="685800" y="1600200"/>
-            <a:ext cx="10820095" cy="1100371"/>
+            <a:ext cx="10820095" cy="1603291"/>
           </a:xfrm>
           <a:prstGeom prst="rect">
             <a:avLst/>
@@ -8021,7 +10270,7 @@
         </p:nvSpPr>
         <p:spPr>
           <a:xfrm>
-            <a:off x="685800" y="2792011"/>
+            <a:off x="685800" y="3477811"/>
             <a:ext cx="10820095" cy="457200"/>
           </a:xfrm>
           <a:prstGeom prst="rect">
@@ -11127,7 +13376,7 @@
         <p:spPr>
           <a:xfrm>
             <a:off x="685800" y="1911095"/>
-            <a:ext cx="10820095" cy="969264"/>
+            <a:ext cx="10820095" cy="1617199"/>
           </a:xfrm>
           <a:prstGeom prst="roundRect">
             <a:avLst>
@@ -11172,7 +13421,7 @@
         <p:spPr>
           <a:xfrm>
             <a:off x="978408" y="2112264"/>
-            <a:ext cx="10234879" cy="603504"/>
+            <a:ext cx="10234879" cy="1251439"/>
           </a:xfrm>
           <a:prstGeom prst="rect">
             <a:avLst/>
@@ -11200,298 +13449,7 @@
                 </a:solidFill>
                 <a:latin typeface="Calibri"/>
               </a:rPr>
-              <a:t>Five tables in, five relationships built by hand, a date table marked and sorted, and three visuals whose totals match the numbers you already got from SQL and pandas. Matching is the mark.</a:t>
-            </a:r>
-          </a:p>
-        </p:txBody>
-      </p:sp>
-      <p:sp>
-        <p:nvSpPr>
-          <p:cNvPr id="6" name="TextBox 5"/>
-          <p:cNvSpPr txBox="1"/>
-          <p:nvPr/>
-        </p:nvSpPr>
-        <p:spPr>
-          <a:xfrm>
-            <a:off x="685800" y="3191256"/>
-            <a:ext cx="10820095" cy="310896"/>
-          </a:xfrm>
-          <a:prstGeom prst="rect">
-            <a:avLst/>
-          </a:prstGeom>
-          <a:noFill/>
-        </p:spPr>
-        <p:txBody>
-          <a:bodyPr wrap="square" lIns="0" rIns="0" tIns="0" bIns="0" anchor="t">
-            <a:spAutoFit/>
-          </a:bodyPr>
-          <a:lstStyle/>
-          <a:p>
-            <a:pPr algn="l">
-              <a:spcAft>
-                <a:spcPts val="600"/>
-              </a:spcAft>
-            </a:pPr>
-            <a:r>
-              <a:rPr sz="1821" b="1" i="0">
-                <a:solidFill>
-                  <a:srgbClr val="E4572E"/>
-                </a:solidFill>
-                <a:latin typeface="Calibri"/>
-              </a:rPr>
-              <a:t>Work these questions in order:</a:t>
-            </a:r>
-          </a:p>
-        </p:txBody>
-      </p:sp>
-      <p:sp>
-        <p:nvSpPr>
-          <p:cNvPr id="7" name="TextBox 6"/>
-          <p:cNvSpPr txBox="1"/>
-          <p:nvPr/>
-        </p:nvSpPr>
-        <p:spPr>
-          <a:xfrm>
-            <a:off x="685800" y="3611879"/>
-            <a:ext cx="5227167" cy="365760"/>
-          </a:xfrm>
-          <a:prstGeom prst="rect">
-            <a:avLst/>
-          </a:prstGeom>
-          <a:noFill/>
-        </p:spPr>
-        <p:txBody>
-          <a:bodyPr wrap="square" lIns="0" rIns="0" tIns="0" bIns="0" anchor="t">
-            <a:spAutoFit/>
-          </a:bodyPr>
-          <a:lstStyle/>
-          <a:p>
-            <a:pPr algn="l">
-              <a:lnSpc>
-                <a:spcPct val="115000"/>
-              </a:lnSpc>
-              <a:spcAft>
-                <a:spcPts val="600"/>
-              </a:spcAft>
-            </a:pPr>
-            <a:r>
-              <a:rPr sz="1716" b="0" i="0">
-                <a:solidFill>
-                  <a:srgbClr val="334657"/>
-                </a:solidFill>
-                <a:latin typeface="Calibri"/>
-              </a:rPr>
-              <a:t>→  Get Data: the five CSVs, loaded separately.</a:t>
-            </a:r>
-          </a:p>
-        </p:txBody>
-      </p:sp>
-      <p:sp>
-        <p:nvSpPr>
-          <p:cNvPr id="8" name="TextBox 7"/>
-          <p:cNvSpPr txBox="1"/>
-          <p:nvPr/>
-        </p:nvSpPr>
-        <p:spPr>
-          <a:xfrm>
-            <a:off x="685800" y="4032504"/>
-            <a:ext cx="5227167" cy="365760"/>
-          </a:xfrm>
-          <a:prstGeom prst="rect">
-            <a:avLst/>
-          </a:prstGeom>
-          <a:noFill/>
-        </p:spPr>
-        <p:txBody>
-          <a:bodyPr wrap="square" lIns="0" rIns="0" tIns="0" bIns="0" anchor="t">
-            <a:spAutoFit/>
-          </a:bodyPr>
-          <a:lstStyle/>
-          <a:p>
-            <a:pPr algn="l">
-              <a:lnSpc>
-                <a:spcPct val="115000"/>
-              </a:lnSpc>
-              <a:spcAft>
-                <a:spcPts val="600"/>
-              </a:spcAft>
-            </a:pPr>
-            <a:r>
-              <a:rPr sz="1716" b="0" i="0">
-                <a:solidFill>
-                  <a:srgbClr val="334657"/>
-                </a:solidFill>
-                <a:latin typeface="Calibri"/>
-              </a:rPr>
-              <a:t>→  Power Query: headers, types, trim. Check the date range.</a:t>
-            </a:r>
-          </a:p>
-        </p:txBody>
-      </p:sp>
-      <p:sp>
-        <p:nvSpPr>
-          <p:cNvPr id="9" name="TextBox 8"/>
-          <p:cNvSpPr txBox="1"/>
-          <p:nvPr/>
-        </p:nvSpPr>
-        <p:spPr>
-          <a:xfrm>
-            <a:off x="685800" y="4453128"/>
-            <a:ext cx="5227167" cy="365760"/>
-          </a:xfrm>
-          <a:prstGeom prst="rect">
-            <a:avLst/>
-          </a:prstGeom>
-          <a:noFill/>
-        </p:spPr>
-        <p:txBody>
-          <a:bodyPr wrap="square" lIns="0" rIns="0" tIns="0" bIns="0" anchor="t">
-            <a:spAutoFit/>
-          </a:bodyPr>
-          <a:lstStyle/>
-          <a:p>
-            <a:pPr algn="l">
-              <a:lnSpc>
-                <a:spcPct val="115000"/>
-              </a:lnSpc>
-              <a:spcAft>
-                <a:spcPts val="600"/>
-              </a:spcAft>
-            </a:pPr>
-            <a:r>
-              <a:rPr sz="1716" b="0" i="0">
-                <a:solidFill>
-                  <a:srgbClr val="334657"/>
-                </a:solidFill>
-                <a:latin typeface="Calibri"/>
-              </a:rPr>
-              <a:t>→  Delete every auto-detected relationship.</a:t>
-            </a:r>
-          </a:p>
-        </p:txBody>
-      </p:sp>
-      <p:sp>
-        <p:nvSpPr>
-          <p:cNvPr id="10" name="TextBox 9"/>
-          <p:cNvSpPr txBox="1"/>
-          <p:nvPr/>
-        </p:nvSpPr>
-        <p:spPr>
-          <a:xfrm>
-            <a:off x="6278727" y="3611879"/>
-            <a:ext cx="5227167" cy="365760"/>
-          </a:xfrm>
-          <a:prstGeom prst="rect">
-            <a:avLst/>
-          </a:prstGeom>
-          <a:noFill/>
-        </p:spPr>
-        <p:txBody>
-          <a:bodyPr wrap="square" lIns="0" rIns="0" tIns="0" bIns="0" anchor="t">
-            <a:spAutoFit/>
-          </a:bodyPr>
-          <a:lstStyle/>
-          <a:p>
-            <a:pPr algn="l">
-              <a:lnSpc>
-                <a:spcPct val="115000"/>
-              </a:lnSpc>
-              <a:spcAft>
-                <a:spcPts val="600"/>
-              </a:spcAft>
-            </a:pPr>
-            <a:r>
-              <a:rPr sz="1716" b="0" i="0">
-                <a:solidFill>
-                  <a:srgbClr val="334657"/>
-                </a:solidFill>
-                <a:latin typeface="Calibri"/>
-              </a:rPr>
-              <a:t>→  Build the five relationships and check each direction.</a:t>
-            </a:r>
-          </a:p>
-        </p:txBody>
-      </p:sp>
-      <p:sp>
-        <p:nvSpPr>
-          <p:cNvPr id="11" name="TextBox 10"/>
-          <p:cNvSpPr txBox="1"/>
-          <p:nvPr/>
-        </p:nvSpPr>
-        <p:spPr>
-          <a:xfrm>
-            <a:off x="6278727" y="4032504"/>
-            <a:ext cx="5227167" cy="365760"/>
-          </a:xfrm>
-          <a:prstGeom prst="rect">
-            <a:avLst/>
-          </a:prstGeom>
-          <a:noFill/>
-        </p:spPr>
-        <p:txBody>
-          <a:bodyPr wrap="square" lIns="0" rIns="0" tIns="0" bIns="0" anchor="t">
-            <a:spAutoFit/>
-          </a:bodyPr>
-          <a:lstStyle/>
-          <a:p>
-            <a:pPr algn="l">
-              <a:lnSpc>
-                <a:spcPct val="115000"/>
-              </a:lnSpc>
-              <a:spcAft>
-                <a:spcPts val="600"/>
-              </a:spcAft>
-            </a:pPr>
-            <a:r>
-              <a:rPr sz="1716" b="0" i="0">
-                <a:solidFill>
-                  <a:srgbClr val="334657"/>
-                </a:solidFill>
-                <a:latin typeface="Calibri"/>
-              </a:rPr>
-              <a:t>→  Add the date table, mark it, sort Month by MonthNo.</a:t>
-            </a:r>
-          </a:p>
-        </p:txBody>
-      </p:sp>
-      <p:sp>
-        <p:nvSpPr>
-          <p:cNvPr id="12" name="TextBox 11"/>
-          <p:cNvSpPr txBox="1"/>
-          <p:nvPr/>
-        </p:nvSpPr>
-        <p:spPr>
-          <a:xfrm>
-            <a:off x="6278727" y="4453128"/>
-            <a:ext cx="5227167" cy="365760"/>
-          </a:xfrm>
-          <a:prstGeom prst="rect">
-            <a:avLst/>
-          </a:prstGeom>
-          <a:noFill/>
-        </p:spPr>
-        <p:txBody>
-          <a:bodyPr wrap="square" lIns="0" rIns="0" tIns="0" bIns="0" anchor="t">
-            <a:spAutoFit/>
-          </a:bodyPr>
-          <a:lstStyle/>
-          <a:p>
-            <a:pPr algn="l">
-              <a:lnSpc>
-                <a:spcPct val="115000"/>
-              </a:lnSpc>
-              <a:spcAft>
-                <a:spcPts val="600"/>
-              </a:spcAft>
-            </a:pPr>
-            <a:r>
-              <a:rPr sz="1716" b="0" i="0">
-                <a:solidFill>
-                  <a:srgbClr val="334657"/>
-                </a:solidFill>
-                <a:latin typeface="Calibri"/>
-              </a:rPr>
-              <a:t>→  Three visuals, each total reconciled against your own earlier answer.</a:t>
+              <a:t>Five tables in, five relationships built by hand, a date table marked and sorted, and three visuals whose totals match the numbers you already got from SQL and pandas. Reconciliation is your practice check.</a:t>
             </a:r>
           </a:p>
         </p:txBody>
@@ -11548,7 +13506,7 @@
                 </a:solidFill>
                 <a:latin typeface="Calibri"/>
               </a:rPr>
-              <a:t>TONIGHT IN THREE LINES</a:t>
+              <a:t>LAB · 50 MINUTES</a:t>
             </a:r>
           </a:p>
         </p:txBody>
@@ -11590,65 +13548,21 @@
                 </a:solidFill>
                 <a:latin typeface="Cambria"/>
               </a:rPr>
-              <a:t>What you can do now</a:t>
-            </a:r>
-          </a:p>
-        </p:txBody>
-      </p:sp>
-      <p:sp>
-        <p:nvSpPr>
-          <p:cNvPr id="4" name="Oval 3"/>
-          <p:cNvSpPr/>
-          <p:nvPr/>
-        </p:nvSpPr>
-        <p:spPr>
-          <a:xfrm>
-            <a:off x="685800" y="1965960"/>
-            <a:ext cx="182880" cy="182880"/>
-          </a:xfrm>
-          <a:prstGeom prst="ellipse">
-            <a:avLst/>
-          </a:prstGeom>
-          <a:solidFill>
-            <a:srgbClr val="2E7D6F"/>
-          </a:solidFill>
-          <a:ln>
-            <a:noFill/>
-          </a:ln>
-          <a:effectLst/>
-        </p:spPr>
-        <p:style>
-          <a:lnRef idx="1">
-            <a:schemeClr val="accent1"/>
-          </a:lnRef>
-          <a:fillRef idx="3">
-            <a:schemeClr val="accent1"/>
-          </a:fillRef>
-          <a:effectRef idx="2">
-            <a:schemeClr val="accent1"/>
-          </a:effectRef>
-          <a:fontRef idx="minor">
-            <a:schemeClr val="lt1"/>
-          </a:fontRef>
-        </p:style>
-        <p:txBody>
-          <a:bodyPr rtlCol="0" anchor="ctr"/>
-          <a:lstStyle/>
-          <a:p>
-            <a:pPr algn="ctr"/>
-          </a:p>
-        </p:txBody>
-      </p:sp>
-      <p:sp>
-        <p:nvSpPr>
-          <p:cNvPr id="5" name="TextBox 4"/>
+              <a:t>Load it, model it, reconcile it continued</a:t>
+            </a:r>
+          </a:p>
+        </p:txBody>
+      </p:sp>
+      <p:sp>
+        <p:nvSpPr>
+          <p:cNvPr id="4" name="TextBox 3"/>
           <p:cNvSpPr txBox="1"/>
           <p:nvPr/>
         </p:nvSpPr>
         <p:spPr>
           <a:xfrm>
-            <a:off x="1097280" y="1911095"/>
-            <a:ext cx="10271455" cy="456345"/>
+            <a:off x="685800" y="1911095"/>
+            <a:ext cx="10820095" cy="310896"/>
           </a:xfrm>
           <a:prstGeom prst="rect">
             <a:avLst/>
@@ -11662,79 +13576,32 @@
           <a:lstStyle/>
           <a:p>
             <a:pPr algn="l">
-              <a:lnSpc>
-                <a:spcPct val="120000"/>
-              </a:lnSpc>
               <a:spcAft>
                 <a:spcPts val="600"/>
               </a:spcAft>
             </a:pPr>
             <a:r>
-              <a:rPr sz="1873" b="0" i="0">
-                <a:solidFill>
-                  <a:srgbClr val="2A3B4A"/>
+              <a:rPr sz="1821" b="1" i="0">
+                <a:solidFill>
+                  <a:srgbClr val="E4572E"/>
                 </a:solidFill>
                 <a:latin typeface="Calibri"/>
               </a:rPr>
-              <a:t>Load several tables and clean them in Power Query without touching the source.</a:t>
-            </a:r>
-          </a:p>
-        </p:txBody>
-      </p:sp>
-      <p:sp>
-        <p:nvSpPr>
-          <p:cNvPr id="6" name="Oval 5"/>
-          <p:cNvSpPr/>
-          <p:nvPr/>
-        </p:nvSpPr>
-        <p:spPr>
-          <a:xfrm>
-            <a:off x="685800" y="2468025"/>
-            <a:ext cx="182880" cy="182880"/>
-          </a:xfrm>
-          <a:prstGeom prst="ellipse">
-            <a:avLst/>
-          </a:prstGeom>
-          <a:solidFill>
-            <a:srgbClr val="2E7D6F"/>
-          </a:solidFill>
-          <a:ln>
-            <a:noFill/>
-          </a:ln>
-          <a:effectLst/>
-        </p:spPr>
-        <p:style>
-          <a:lnRef idx="1">
-            <a:schemeClr val="accent1"/>
-          </a:lnRef>
-          <a:fillRef idx="3">
-            <a:schemeClr val="accent1"/>
-          </a:fillRef>
-          <a:effectRef idx="2">
-            <a:schemeClr val="accent1"/>
-          </a:effectRef>
-          <a:fontRef idx="minor">
-            <a:schemeClr val="lt1"/>
-          </a:fontRef>
-        </p:style>
-        <p:txBody>
-          <a:bodyPr rtlCol="0" anchor="ctr"/>
-          <a:lstStyle/>
-          <a:p>
-            <a:pPr algn="ctr"/>
-          </a:p>
-        </p:txBody>
-      </p:sp>
-      <p:sp>
-        <p:nvSpPr>
-          <p:cNvPr id="7" name="TextBox 6"/>
+              <a:t>Work these questions in order</a:t>
+            </a:r>
+          </a:p>
+        </p:txBody>
+      </p:sp>
+      <p:sp>
+        <p:nvSpPr>
+          <p:cNvPr id="5" name="TextBox 4"/>
           <p:cNvSpPr txBox="1"/>
           <p:nvPr/>
         </p:nvSpPr>
         <p:spPr>
           <a:xfrm>
-            <a:off x="1097280" y="2413161"/>
-            <a:ext cx="10271455" cy="456345"/>
+            <a:off x="685800" y="2386584"/>
+            <a:ext cx="5227167" cy="385501"/>
           </a:xfrm>
           <a:prstGeom prst="rect">
             <a:avLst/>
@@ -11749,78 +13616,34 @@
           <a:p>
             <a:pPr algn="l">
               <a:lnSpc>
-                <a:spcPct val="120000"/>
+                <a:spcPct val="115000"/>
               </a:lnSpc>
               <a:spcAft>
                 <a:spcPts val="600"/>
               </a:spcAft>
             </a:pPr>
             <a:r>
-              <a:rPr sz="1873" b="0" i="0">
-                <a:solidFill>
-                  <a:srgbClr val="2A3B4A"/>
+              <a:rPr sz="1716" b="0" i="0">
+                <a:solidFill>
+                  <a:srgbClr val="334657"/>
                 </a:solidFill>
                 <a:latin typeface="Calibri"/>
               </a:rPr>
-              <a:t>Build a star schema whose totals are correct.</a:t>
-            </a:r>
-          </a:p>
-        </p:txBody>
-      </p:sp>
-      <p:sp>
-        <p:nvSpPr>
-          <p:cNvPr id="8" name="Oval 7"/>
-          <p:cNvSpPr/>
-          <p:nvPr/>
-        </p:nvSpPr>
-        <p:spPr>
-          <a:xfrm>
-            <a:off x="685800" y="2970091"/>
-            <a:ext cx="182880" cy="182880"/>
-          </a:xfrm>
-          <a:prstGeom prst="ellipse">
-            <a:avLst/>
-          </a:prstGeom>
-          <a:solidFill>
-            <a:srgbClr val="2E7D6F"/>
-          </a:solidFill>
-          <a:ln>
-            <a:noFill/>
-          </a:ln>
-          <a:effectLst/>
-        </p:spPr>
-        <p:style>
-          <a:lnRef idx="1">
-            <a:schemeClr val="accent1"/>
-          </a:lnRef>
-          <a:fillRef idx="3">
-            <a:schemeClr val="accent1"/>
-          </a:fillRef>
-          <a:effectRef idx="2">
-            <a:schemeClr val="accent1"/>
-          </a:effectRef>
-          <a:fontRef idx="minor">
-            <a:schemeClr val="lt1"/>
-          </a:fontRef>
-        </p:style>
-        <p:txBody>
-          <a:bodyPr rtlCol="0" anchor="ctr"/>
-          <a:lstStyle/>
-          <a:p>
-            <a:pPr algn="ctr"/>
-          </a:p>
-        </p:txBody>
-      </p:sp>
-      <p:sp>
-        <p:nvSpPr>
-          <p:cNvPr id="9" name="TextBox 8"/>
+              <a:t>Get Data: the five CSVs, loaded separately.</a:t>
+            </a:r>
+          </a:p>
+        </p:txBody>
+      </p:sp>
+      <p:sp>
+        <p:nvSpPr>
+          <p:cNvPr id="6" name="TextBox 5"/>
           <p:cNvSpPr txBox="1"/>
           <p:nvPr/>
         </p:nvSpPr>
         <p:spPr>
           <a:xfrm>
-            <a:off x="1097280" y="2915227"/>
-            <a:ext cx="10271455" cy="456345"/>
+            <a:off x="685800" y="2863525"/>
+            <a:ext cx="5227167" cy="697851"/>
           </a:xfrm>
           <a:prstGeom prst="rect">
             <a:avLst/>
@@ -11835,20 +13658,188 @@
           <a:p>
             <a:pPr algn="l">
               <a:lnSpc>
-                <a:spcPct val="120000"/>
+                <a:spcPct val="115000"/>
               </a:lnSpc>
               <a:spcAft>
                 <a:spcPts val="600"/>
               </a:spcAft>
             </a:pPr>
             <a:r>
-              <a:rPr sz="1873" b="0" i="0">
-                <a:solidFill>
-                  <a:srgbClr val="2A3B4A"/>
+              <a:rPr sz="1716" b="0" i="0">
+                <a:solidFill>
+                  <a:srgbClr val="334657"/>
                 </a:solidFill>
                 <a:latin typeface="Calibri"/>
               </a:rPr>
-              <a:t>Check a dashboard total against a number you already trust.</a:t>
+              <a:t>Power Query: headers, types, trim. Check the date range.</a:t>
+            </a:r>
+          </a:p>
+        </p:txBody>
+      </p:sp>
+      <p:sp>
+        <p:nvSpPr>
+          <p:cNvPr id="7" name="TextBox 6"/>
+          <p:cNvSpPr txBox="1"/>
+          <p:nvPr/>
+        </p:nvSpPr>
+        <p:spPr>
+          <a:xfrm>
+            <a:off x="685800" y="3652817"/>
+            <a:ext cx="5227167" cy="385501"/>
+          </a:xfrm>
+          <a:prstGeom prst="rect">
+            <a:avLst/>
+          </a:prstGeom>
+          <a:noFill/>
+        </p:spPr>
+        <p:txBody>
+          <a:bodyPr wrap="square" lIns="0" rIns="0" tIns="0" bIns="0" anchor="t">
+            <a:spAutoFit/>
+          </a:bodyPr>
+          <a:lstStyle/>
+          <a:p>
+            <a:pPr algn="l">
+              <a:lnSpc>
+                <a:spcPct val="115000"/>
+              </a:lnSpc>
+              <a:spcAft>
+                <a:spcPts val="600"/>
+              </a:spcAft>
+            </a:pPr>
+            <a:r>
+              <a:rPr sz="1716" b="0" i="0">
+                <a:solidFill>
+                  <a:srgbClr val="334657"/>
+                </a:solidFill>
+                <a:latin typeface="Calibri"/>
+              </a:rPr>
+              <a:t>Delete every auto-detected relationship.</a:t>
+            </a:r>
+          </a:p>
+        </p:txBody>
+      </p:sp>
+      <p:sp>
+        <p:nvSpPr>
+          <p:cNvPr id="8" name="TextBox 7"/>
+          <p:cNvSpPr txBox="1"/>
+          <p:nvPr/>
+        </p:nvSpPr>
+        <p:spPr>
+          <a:xfrm>
+            <a:off x="6278727" y="2386584"/>
+            <a:ext cx="5227167" cy="697851"/>
+          </a:xfrm>
+          <a:prstGeom prst="rect">
+            <a:avLst/>
+          </a:prstGeom>
+          <a:noFill/>
+        </p:spPr>
+        <p:txBody>
+          <a:bodyPr wrap="square" lIns="0" rIns="0" tIns="0" bIns="0" anchor="t">
+            <a:spAutoFit/>
+          </a:bodyPr>
+          <a:lstStyle/>
+          <a:p>
+            <a:pPr algn="l">
+              <a:lnSpc>
+                <a:spcPct val="115000"/>
+              </a:lnSpc>
+              <a:spcAft>
+                <a:spcPts val="600"/>
+              </a:spcAft>
+            </a:pPr>
+            <a:r>
+              <a:rPr sz="1716" b="0" i="0">
+                <a:solidFill>
+                  <a:srgbClr val="334657"/>
+                </a:solidFill>
+                <a:latin typeface="Calibri"/>
+              </a:rPr>
+              <a:t>Build the four source-table relationships and check each direction.</a:t>
+            </a:r>
+          </a:p>
+        </p:txBody>
+      </p:sp>
+      <p:sp>
+        <p:nvSpPr>
+          <p:cNvPr id="9" name="TextBox 8"/>
+          <p:cNvSpPr txBox="1"/>
+          <p:nvPr/>
+        </p:nvSpPr>
+        <p:spPr>
+          <a:xfrm>
+            <a:off x="6278727" y="3175875"/>
+            <a:ext cx="5227167" cy="697851"/>
+          </a:xfrm>
+          <a:prstGeom prst="rect">
+            <a:avLst/>
+          </a:prstGeom>
+          <a:noFill/>
+        </p:spPr>
+        <p:txBody>
+          <a:bodyPr wrap="square" lIns="0" rIns="0" tIns="0" bIns="0" anchor="t">
+            <a:spAutoFit/>
+          </a:bodyPr>
+          <a:lstStyle/>
+          <a:p>
+            <a:pPr algn="l">
+              <a:lnSpc>
+                <a:spcPct val="115000"/>
+              </a:lnSpc>
+              <a:spcAft>
+                <a:spcPts val="600"/>
+              </a:spcAft>
+            </a:pPr>
+            <a:r>
+              <a:rPr sz="1716" b="0" i="0">
+                <a:solidFill>
+                  <a:srgbClr val="334657"/>
+                </a:solidFill>
+                <a:latin typeface="Calibri"/>
+              </a:rPr>
+              <a:t>Add the date table and fifth relationship. Mark it; sort Month by MonthNo.</a:t>
+            </a:r>
+          </a:p>
+        </p:txBody>
+      </p:sp>
+      <p:sp>
+        <p:nvSpPr>
+          <p:cNvPr id="10" name="TextBox 9"/>
+          <p:cNvSpPr txBox="1"/>
+          <p:nvPr/>
+        </p:nvSpPr>
+        <p:spPr>
+          <a:xfrm>
+            <a:off x="6278727" y="3965167"/>
+            <a:ext cx="5227167" cy="697851"/>
+          </a:xfrm>
+          <a:prstGeom prst="rect">
+            <a:avLst/>
+          </a:prstGeom>
+          <a:noFill/>
+        </p:spPr>
+        <p:txBody>
+          <a:bodyPr wrap="square" lIns="0" rIns="0" tIns="0" bIns="0" anchor="t">
+            <a:spAutoFit/>
+          </a:bodyPr>
+          <a:lstStyle/>
+          <a:p>
+            <a:pPr algn="l">
+              <a:lnSpc>
+                <a:spcPct val="115000"/>
+              </a:lnSpc>
+              <a:spcAft>
+                <a:spcPts val="600"/>
+              </a:spcAft>
+            </a:pPr>
+            <a:r>
+              <a:rPr sz="1716" b="0" i="0">
+                <a:solidFill>
+                  <a:srgbClr val="334657"/>
+                </a:solidFill>
+                <a:latin typeface="Calibri"/>
+              </a:rPr>
+              <a:t>Three visuals, each total reconciled against your own earlier answer.</a:t>
             </a:r>
           </a:p>
         </p:txBody>
@@ -11905,7 +13896,7 @@
                 </a:solidFill>
                 <a:latin typeface="Calibri"/>
               </a:rPr>
-              <a:t>HOMEWORK · 45 TO 60 MINUTES</a:t>
+              <a:t>TONIGHT IN THREE LINES</a:t>
             </a:r>
           </a:p>
         </p:txBody>
@@ -11947,33 +13938,32 @@
                 </a:solidFill>
                 <a:latin typeface="Cambria"/>
               </a:rPr>
-              <a:t>Before the next session</a:t>
-            </a:r>
-          </a:p>
-        </p:txBody>
-      </p:sp>
-      <p:sp>
-        <p:nvSpPr>
-          <p:cNvPr id="4" name="Rounded Rectangle 3"/>
+              <a:t>What you can do now</a:t>
+            </a:r>
+          </a:p>
+        </p:txBody>
+      </p:sp>
+      <p:sp>
+        <p:nvSpPr>
+          <p:cNvPr id="4" name="Oval 3"/>
           <p:cNvSpPr/>
           <p:nvPr/>
         </p:nvSpPr>
         <p:spPr>
           <a:xfrm>
-            <a:off x="685800" y="1911095"/>
-            <a:ext cx="10820095" cy="1237967"/>
-          </a:xfrm>
-          <a:prstGeom prst="roundRect">
-            <a:avLst>
-              <a:gd name="adj" fmla="val 6000"/>
-            </a:avLst>
+            <a:off x="685800" y="1965960"/>
+            <a:ext cx="182880" cy="182880"/>
+          </a:xfrm>
+          <a:prstGeom prst="ellipse">
+            <a:avLst/>
           </a:prstGeom>
           <a:solidFill>
-            <a:srgbClr val="E8EDF2"/>
+            <a:srgbClr val="2E7D6F"/>
           </a:solidFill>
           <a:ln>
             <a:noFill/>
           </a:ln>
+          <a:effectLst/>
         </p:spPr>
         <p:style>
           <a:lnRef idx="1">
@@ -12005,8 +13995,8 @@
         </p:nvSpPr>
         <p:spPr>
           <a:xfrm>
-            <a:off x="978408" y="2130552"/>
-            <a:ext cx="10234879" cy="835631"/>
+            <a:off x="1097280" y="1911095"/>
+            <a:ext cx="10271455" cy="456345"/>
           </a:xfrm>
           <a:prstGeom prst="rect">
             <a:avLst/>
@@ -12021,36 +14011,36 @@
           <a:p>
             <a:pPr algn="l">
               <a:lnSpc>
-                <a:spcPct val="122000"/>
+                <a:spcPct val="120000"/>
               </a:lnSpc>
               <a:spcAft>
                 <a:spcPts val="600"/>
               </a:spcAft>
             </a:pPr>
             <a:r>
-              <a:rPr sz="2021" b="0" i="0">
-                <a:solidFill>
-                  <a:srgbClr val="1C3144"/>
+              <a:rPr sz="1873" b="0" i="0">
+                <a:solidFill>
+                  <a:srgbClr val="2A3B4A"/>
                 </a:solidFill>
                 <a:latin typeface="Calibri"/>
               </a:rPr>
-              <a:t>Add the Uganda Healthsites file and put a map visual on it. Notice what that file makes easy and what it makes impossible.</a:t>
-            </a:r>
-          </a:p>
-        </p:txBody>
-      </p:sp>
-      <p:sp>
-        <p:nvSpPr>
-          <p:cNvPr id="6" name="Rounded Rectangle 5"/>
+              <a:t>Load several tables and clean them in Power Query without touching the source.</a:t>
+            </a:r>
+          </a:p>
+        </p:txBody>
+      </p:sp>
+      <p:sp>
+        <p:nvSpPr>
+          <p:cNvPr id="6" name="Oval 5"/>
           <p:cNvSpPr/>
           <p:nvPr/>
         </p:nvSpPr>
         <p:spPr>
           <a:xfrm>
-            <a:off x="685800" y="3423383"/>
-            <a:ext cx="4826861" cy="384048"/>
-          </a:xfrm>
-          <a:prstGeom prst="roundRect">
+            <a:off x="685800" y="2468025"/>
+            <a:ext cx="182880" cy="182880"/>
+          </a:xfrm>
+          <a:prstGeom prst="ellipse">
             <a:avLst/>
           </a:prstGeom>
           <a:solidFill>
@@ -12076,19 +14066,10 @@
           </a:fontRef>
         </p:style>
         <p:txBody>
-          <a:bodyPr rtlCol="0" anchor="ctr" lIns="0" rIns="0" tIns="0" bIns="0" wrap="none"/>
+          <a:bodyPr rtlCol="0" anchor="ctr"/>
           <a:lstStyle/>
           <a:p>
             <a:pPr algn="ctr"/>
-            <a:r>
-              <a:rPr sz="1452" b="1">
-                <a:solidFill>
-                  <a:srgbClr val="FFFFFF"/>
-                </a:solidFill>
-                <a:latin typeface="Calibri"/>
-              </a:rPr>
-              <a:t>WHY IT IS ALWAYS OPTIONAL ON YOUR OWN DATA</a:t>
-            </a:r>
           </a:p>
         </p:txBody>
       </p:sp>
@@ -12100,8 +14081,8 @@
         </p:nvSpPr>
         <p:spPr>
           <a:xfrm>
-            <a:off x="685800" y="3990311"/>
-            <a:ext cx="10820095" cy="1097280"/>
+            <a:off x="1097280" y="2413161"/>
+            <a:ext cx="10271455" cy="456345"/>
           </a:xfrm>
           <a:prstGeom prst="rect">
             <a:avLst/>
@@ -12116,20 +14097,106 @@
           <a:p>
             <a:pPr algn="l">
               <a:lnSpc>
-                <a:spcPct val="122000"/>
+                <a:spcPct val="120000"/>
               </a:lnSpc>
               <a:spcAft>
                 <a:spcPts val="600"/>
               </a:spcAft>
             </a:pPr>
             <a:r>
-              <a:rPr sz="1923" b="0" i="0">
-                <a:solidFill>
-                  <a:srgbClr val="334657"/>
+              <a:rPr sz="1873" b="0" i="0">
+                <a:solidFill>
+                  <a:srgbClr val="2A3B4A"/>
                 </a:solidFill>
                 <a:latin typeface="Calibri"/>
               </a:rPr>
-              <a:t>Homework on a dataset you already care about gets done. Homework on a teaching dataset competes with your job and loses. Either version counts, and the one on your own data is worth more to you.</a:t>
+              <a:t>Build a relational model whose totals reconcile.</a:t>
+            </a:r>
+          </a:p>
+        </p:txBody>
+      </p:sp>
+      <p:sp>
+        <p:nvSpPr>
+          <p:cNvPr id="8" name="Oval 7"/>
+          <p:cNvSpPr/>
+          <p:nvPr/>
+        </p:nvSpPr>
+        <p:spPr>
+          <a:xfrm>
+            <a:off x="685800" y="2970091"/>
+            <a:ext cx="182880" cy="182880"/>
+          </a:xfrm>
+          <a:prstGeom prst="ellipse">
+            <a:avLst/>
+          </a:prstGeom>
+          <a:solidFill>
+            <a:srgbClr val="2E7D6F"/>
+          </a:solidFill>
+          <a:ln>
+            <a:noFill/>
+          </a:ln>
+          <a:effectLst/>
+        </p:spPr>
+        <p:style>
+          <a:lnRef idx="1">
+            <a:schemeClr val="accent1"/>
+          </a:lnRef>
+          <a:fillRef idx="3">
+            <a:schemeClr val="accent1"/>
+          </a:fillRef>
+          <a:effectRef idx="2">
+            <a:schemeClr val="accent1"/>
+          </a:effectRef>
+          <a:fontRef idx="minor">
+            <a:schemeClr val="lt1"/>
+          </a:fontRef>
+        </p:style>
+        <p:txBody>
+          <a:bodyPr rtlCol="0" anchor="ctr"/>
+          <a:lstStyle/>
+          <a:p>
+            <a:pPr algn="ctr"/>
+          </a:p>
+        </p:txBody>
+      </p:sp>
+      <p:sp>
+        <p:nvSpPr>
+          <p:cNvPr id="9" name="TextBox 8"/>
+          <p:cNvSpPr txBox="1"/>
+          <p:nvPr/>
+        </p:nvSpPr>
+        <p:spPr>
+          <a:xfrm>
+            <a:off x="1097280" y="2915227"/>
+            <a:ext cx="10271455" cy="456345"/>
+          </a:xfrm>
+          <a:prstGeom prst="rect">
+            <a:avLst/>
+          </a:prstGeom>
+          <a:noFill/>
+        </p:spPr>
+        <p:txBody>
+          <a:bodyPr wrap="square" lIns="0" rIns="0" tIns="0" bIns="0" anchor="t">
+            <a:spAutoFit/>
+          </a:bodyPr>
+          <a:lstStyle/>
+          <a:p>
+            <a:pPr algn="l">
+              <a:lnSpc>
+                <a:spcPct val="120000"/>
+              </a:lnSpc>
+              <a:spcAft>
+                <a:spcPts val="600"/>
+              </a:spcAft>
+            </a:pPr>
+            <a:r>
+              <a:rPr sz="1873" b="0" i="0">
+                <a:solidFill>
+                  <a:srgbClr val="2A3B4A"/>
+                </a:solidFill>
+                <a:latin typeface="Calibri"/>
+              </a:rPr>
+              <a:t>Check a dashboard total against a number you already trust.</a:t>
             </a:r>
           </a:p>
         </p:txBody>
@@ -12154,6 +14221,287 @@
       <p:grpSpPr/>
       <p:sp>
         <p:nvSpPr>
+          <p:cNvPr id="2" name="TextBox 1"/>
+          <p:cNvSpPr txBox="1"/>
+          <p:nvPr/>
+        </p:nvSpPr>
+        <p:spPr>
+          <a:xfrm>
+            <a:off x="685800" y="566928"/>
+            <a:ext cx="10820095" cy="292608"/>
+          </a:xfrm>
+          <a:prstGeom prst="rect">
+            <a:avLst/>
+          </a:prstGeom>
+          <a:noFill/>
+        </p:spPr>
+        <p:txBody>
+          <a:bodyPr wrap="square" lIns="0" rIns="0" tIns="0" bIns="0" anchor="t">
+            <a:spAutoFit/>
+          </a:bodyPr>
+          <a:lstStyle/>
+          <a:p>
+            <a:pPr algn="l">
+              <a:spcAft>
+                <a:spcPts val="600"/>
+              </a:spcAft>
+            </a:pPr>
+            <a:r>
+              <a:rPr sz="1584" b="1" i="0">
+                <a:solidFill>
+                  <a:srgbClr val="E4572E"/>
+                </a:solidFill>
+                <a:latin typeface="Calibri"/>
+              </a:rPr>
+              <a:t>HOMEWORK · 45 TO 60 MINUTES</a:t>
+            </a:r>
+          </a:p>
+        </p:txBody>
+      </p:sp>
+      <p:sp>
+        <p:nvSpPr>
+          <p:cNvPr id="3" name="TextBox 2"/>
+          <p:cNvSpPr txBox="1"/>
+          <p:nvPr/>
+        </p:nvSpPr>
+        <p:spPr>
+          <a:xfrm>
+            <a:off x="685800" y="950976"/>
+            <a:ext cx="10820095" cy="777240"/>
+          </a:xfrm>
+          <a:prstGeom prst="rect">
+            <a:avLst/>
+          </a:prstGeom>
+          <a:noFill/>
+        </p:spPr>
+        <p:txBody>
+          <a:bodyPr wrap="square" lIns="0" rIns="0" tIns="0" bIns="0" anchor="t">
+            <a:spAutoFit/>
+          </a:bodyPr>
+          <a:lstStyle/>
+          <a:p>
+            <a:pPr algn="l">
+              <a:lnSpc>
+                <a:spcPct val="100000"/>
+              </a:lnSpc>
+              <a:spcAft>
+                <a:spcPts val="600"/>
+              </a:spcAft>
+            </a:pPr>
+            <a:r>
+              <a:rPr sz="3200" b="1" i="0">
+                <a:solidFill>
+                  <a:srgbClr val="1C3144"/>
+                </a:solidFill>
+                <a:latin typeface="Cambria"/>
+              </a:rPr>
+              <a:t>Before the next session</a:t>
+            </a:r>
+          </a:p>
+        </p:txBody>
+      </p:sp>
+      <p:sp>
+        <p:nvSpPr>
+          <p:cNvPr id="4" name="Rounded Rectangle 3"/>
+          <p:cNvSpPr/>
+          <p:nvPr/>
+        </p:nvSpPr>
+        <p:spPr>
+          <a:xfrm>
+            <a:off x="685800" y="1911095"/>
+            <a:ext cx="10820095" cy="1237967"/>
+          </a:xfrm>
+          <a:prstGeom prst="roundRect">
+            <a:avLst>
+              <a:gd name="adj" fmla="val 6000"/>
+            </a:avLst>
+          </a:prstGeom>
+          <a:solidFill>
+            <a:srgbClr val="E8EDF2"/>
+          </a:solidFill>
+          <a:ln>
+            <a:noFill/>
+          </a:ln>
+        </p:spPr>
+        <p:style>
+          <a:lnRef idx="1">
+            <a:schemeClr val="accent1"/>
+          </a:lnRef>
+          <a:fillRef idx="3">
+            <a:schemeClr val="accent1"/>
+          </a:fillRef>
+          <a:effectRef idx="2">
+            <a:schemeClr val="accent1"/>
+          </a:effectRef>
+          <a:fontRef idx="minor">
+            <a:schemeClr val="lt1"/>
+          </a:fontRef>
+        </p:style>
+        <p:txBody>
+          <a:bodyPr rtlCol="0" anchor="ctr"/>
+          <a:lstStyle/>
+          <a:p>
+            <a:pPr algn="ctr"/>
+          </a:p>
+        </p:txBody>
+      </p:sp>
+      <p:sp>
+        <p:nvSpPr>
+          <p:cNvPr id="5" name="TextBox 4"/>
+          <p:cNvSpPr txBox="1"/>
+          <p:nvPr/>
+        </p:nvSpPr>
+        <p:spPr>
+          <a:xfrm>
+            <a:off x="978408" y="2130552"/>
+            <a:ext cx="10234879" cy="835631"/>
+          </a:xfrm>
+          <a:prstGeom prst="rect">
+            <a:avLst/>
+          </a:prstGeom>
+          <a:noFill/>
+        </p:spPr>
+        <p:txBody>
+          <a:bodyPr wrap="square" lIns="0" rIns="0" tIns="0" bIns="0" anchor="t">
+            <a:spAutoFit/>
+          </a:bodyPr>
+          <a:lstStyle/>
+          <a:p>
+            <a:pPr algn="l">
+              <a:lnSpc>
+                <a:spcPct val="122000"/>
+              </a:lnSpc>
+              <a:spcAft>
+                <a:spcPts val="600"/>
+              </a:spcAft>
+            </a:pPr>
+            <a:r>
+              <a:rPr sz="2021" b="0" i="0">
+                <a:solidFill>
+                  <a:srgbClr val="1C3144"/>
+                </a:solidFill>
+                <a:latin typeface="Calibri"/>
+              </a:rPr>
+              <a:t>Add the Uganda Healthsites file and put a map visual on it. Notice what that file makes easy and what it makes impossible.</a:t>
+            </a:r>
+          </a:p>
+        </p:txBody>
+      </p:sp>
+      <p:sp>
+        <p:nvSpPr>
+          <p:cNvPr id="6" name="Rounded Rectangle 5"/>
+          <p:cNvSpPr/>
+          <p:nvPr/>
+        </p:nvSpPr>
+        <p:spPr>
+          <a:xfrm>
+            <a:off x="685800" y="3423383"/>
+            <a:ext cx="4826861" cy="384048"/>
+          </a:xfrm>
+          <a:prstGeom prst="roundRect">
+            <a:avLst/>
+          </a:prstGeom>
+          <a:solidFill>
+            <a:srgbClr val="2E7D6F"/>
+          </a:solidFill>
+          <a:ln>
+            <a:noFill/>
+          </a:ln>
+          <a:effectLst/>
+        </p:spPr>
+        <p:style>
+          <a:lnRef idx="1">
+            <a:schemeClr val="accent1"/>
+          </a:lnRef>
+          <a:fillRef idx="3">
+            <a:schemeClr val="accent1"/>
+          </a:fillRef>
+          <a:effectRef idx="2">
+            <a:schemeClr val="accent1"/>
+          </a:effectRef>
+          <a:fontRef idx="minor">
+            <a:schemeClr val="lt1"/>
+          </a:fontRef>
+        </p:style>
+        <p:txBody>
+          <a:bodyPr rtlCol="0" anchor="ctr" lIns="0" rIns="0" tIns="0" bIns="0" wrap="none"/>
+          <a:lstStyle/>
+          <a:p>
+            <a:pPr algn="ctr"/>
+            <a:r>
+              <a:rPr sz="1452" b="1">
+                <a:solidFill>
+                  <a:srgbClr val="FFFFFF"/>
+                </a:solidFill>
+                <a:latin typeface="Calibri"/>
+              </a:rPr>
+              <a:t>WHY IT IS ALWAYS OPTIONAL ON YOUR OWN DATA</a:t>
+            </a:r>
+          </a:p>
+        </p:txBody>
+      </p:sp>
+      <p:sp>
+        <p:nvSpPr>
+          <p:cNvPr id="7" name="TextBox 6"/>
+          <p:cNvSpPr txBox="1"/>
+          <p:nvPr/>
+        </p:nvSpPr>
+        <p:spPr>
+          <a:xfrm>
+            <a:off x="685800" y="3990311"/>
+            <a:ext cx="10820095" cy="1097280"/>
+          </a:xfrm>
+          <a:prstGeom prst="rect">
+            <a:avLst/>
+          </a:prstGeom>
+          <a:noFill/>
+        </p:spPr>
+        <p:txBody>
+          <a:bodyPr wrap="square" lIns="0" rIns="0" tIns="0" bIns="0" anchor="t">
+            <a:spAutoFit/>
+          </a:bodyPr>
+          <a:lstStyle/>
+          <a:p>
+            <a:pPr algn="l">
+              <a:lnSpc>
+                <a:spcPct val="122000"/>
+              </a:lnSpc>
+              <a:spcAft>
+                <a:spcPts val="600"/>
+              </a:spcAft>
+            </a:pPr>
+            <a:r>
+              <a:rPr sz="1923" b="0" i="0">
+                <a:solidFill>
+                  <a:srgbClr val="334657"/>
+                </a:solidFill>
+                <a:latin typeface="Calibri"/>
+              </a:rPr>
+              <a:t>Homework on a dataset you already care about gets done. Homework on a teaching dataset competes with your job and loses. Either version counts, and the one on your own data is worth more to you.</a:t>
+            </a:r>
+          </a:p>
+        </p:txBody>
+      </p:sp>
+    </p:spTree>
+  </p:cSld>
+  <p:clrMapOvr>
+    <a:masterClrMapping/>
+  </p:clrMapOvr>
+</p:sld>
+</file>
+
+<file path=ppt/slides/slide25.xml><?xml version="1.0" encoding="utf-8"?>
+<p:sld xmlns:a="http://schemas.openxmlformats.org/drawingml/2006/main" xmlns:p="http://schemas.openxmlformats.org/presentationml/2006/main" xmlns:r="http://schemas.openxmlformats.org/officeDocument/2006/relationships">
+  <p:cSld>
+    <p:spTree>
+      <p:nvGrpSpPr>
+        <p:cNvPr id="1" name=""/>
+        <p:cNvGrpSpPr/>
+        <p:nvPr/>
+      </p:nvGrpSpPr>
+      <p:grpSpPr/>
+      <p:sp>
+        <p:nvSpPr>
           <p:cNvPr id="2" name="Rectangle 1"/>
           <p:cNvSpPr/>
           <p:nvPr/>
@@ -13415,7 +15763,7 @@
                 </a:solidFill>
                 <a:latin typeface="Calibri"/>
               </a:rPr>
-              <a:t>A separate table with one row per date. Without one, your months sort alphabetically.</a:t>
+              <a:t>A table with one row per date for consistent time filtering. Sort month names by month number.</a:t>
             </a:r>
           </a:p>
         </p:txBody>
@@ -13743,7 +16091,7 @@
                 </a:solidFill>
                 <a:latin typeface="Calibri"/>
               </a:rPr>
-              <a:t>Build a star schema whose totals are correct.</a:t>
+              <a:t>Build a relational model whose totals reconcile.</a:t>
             </a:r>
           </a:p>
         </p:txBody>
@@ -14266,7 +16614,7 @@
                 </a:solidFill>
                 <a:latin typeface="Calibri"/>
               </a:rPr>
-              <a:t>Power BI is three products people confuse: Power Query gets and shapes, the model relates, the report shows. Get Data from CSV, then Power Query: promote headers, set types, trim, remove duplicates. The Applied Steps lis</a:t>
+              <a:t>Power BI is three products people confuse: Power Query gets and shapes, the model relates, the report shows.</a:t>
             </a:r>
           </a:p>
         </p:txBody>
@@ -15039,7 +17387,7 @@
                 </a:solidFill>
                 <a:latin typeface="Calibri"/>
               </a:rPr>
-              <a:t>On a Mac you get the third one only</a:t>
+              <a:t>The browser route needs a readiness check</a:t>
             </a:r>
           </a:p>
         </p:txBody>
@@ -15081,7 +17429,7 @@
                 </a:solidFill>
                 <a:latin typeface="Calibri"/>
               </a:rPr>
-              <a:t>Power BI Desktop is Windows only. The browser Service can build reports on uploaded data, so Mac participants clean in pandas first and upload clean CSVs. Both paths are on the lab sheet.</a:t>
+              <a:t>Power BI Desktop is Windows only. The browser Service can edit models and use Power Query when permissions and tenant settings allow it. Test the supplied CSV workflow with the actual student account before class.</a:t>
             </a:r>
           </a:p>
         </p:txBody>
